--- a/docs/YIA_Jobs_soutenance.pptx
+++ b/docs/YIA_Jobs_soutenance.pptx
@@ -730,23 +730,23 @@
           <a:lstStyle/>
           <a:p>
             <a:r>
-              <a:rPr lang="fr-FR"/>
-              <a:t>INTERVENANT : Axel · 15 s, puis la démonstration</a:t>
-            </a:r>
-          </a:p>
-          <a:p>
-            <a:endParaRPr lang="fr-FR"/>
-          </a:p>
-          <a:p>
-            <a:r>
-              <a:rPr lang="fr-FR"/>
+              <a:rPr lang="fr-FR" dirty="0"/>
+              <a:t>INTERVENANT : Axel · 15 s, puis la démonstration par Axel, Yohan et Ismail</a:t>
+            </a:r>
+          </a:p>
+          <a:p>
+            <a:endParaRPr lang="fr-FR" dirty="0"/>
+          </a:p>
+          <a:p>
+            <a:r>
+              <a:rPr lang="fr-FR" dirty="0"/>
               <a:t>COMPLÉMENT</a:t>
             </a:r>
           </a:p>
           <a:p>
             <a:r>
-              <a:rPr lang="fr-FR"/>
-              <a:t>Une personne parle, une autre manipule. Serveur et site lancés avant la présentation, base remplie, terminal du serveur visible pour le lien de confirmation. Compte administrateur prêt. Aucun mot de passe affiché à l'écran.</a:t>
+              <a:rPr lang="fr-FR" dirty="0"/>
+              <a:t>Une personne parle, une autre manipule. Serveur et site lancés avant la présentation, base remplie, terminal du serveur visible pour le lien de confirmation. Compte administrateur prêt. Aucun mot de passe affiché à l'écran. Étapes 02 et 03 : la même adresse e-mail, sinon aucun lien de confirmation n'est envoyé.</a:t>
             </a:r>
           </a:p>
         </p:txBody>
@@ -832,12 +832,12 @@
           <a:lstStyle/>
           <a:p>
             <a:r>
-              <a:rPr lang="fr-FR"/>
+              <a:rPr lang="fr-FR" dirty="0"/>
               <a:t>INTERVENANT : Axel · 20 s, après la démonstration</a:t>
             </a:r>
           </a:p>
           <a:p>
-            <a:endParaRPr lang="fr-FR"/>
+            <a:endParaRPr lang="fr-FR" dirty="0"/>
           </a:p>
           <a:p>
             <a:r>
@@ -847,19 +847,27 @@
           </a:p>
           <a:p>
             <a:r>
-              <a:rPr lang="fr-FR"/>
-              <a:t>Conclure sur la preuve : tout ce qui vient d'être montré est écrit et vérifiable dans le dépôt. Un clic sur le bloc ouvre docs/choix_techniques_front.md sur GitHub (dépôt Epitech, branche main).</a:t>
-            </a:r>
-          </a:p>
-          <a:p>
-            <a:r>
-              <a:rPr lang="fr-FR"/>
-              <a:t>Ce fichier n'est pas encore poussé au 13 octobre : il doit être sur main avant la soutenance, sinon le lien est mort. Le contrat d'API (docs/contrat_api.md) y est déjà.</a:t>
-            </a:r>
-          </a:p>
-          <a:p>
-            <a:r>
-              <a:rPr lang="fr-FR"/>
+              <a:rPr lang="fr-FR" dirty="0"/>
+              <a:t>Conclure sur la preuve : tout ce qui vient d'être montré est écrit et vérifiable dans le dépôt. Un clic sur le bloc ouvre docs/choix_techniques_front.md sur GitHub (dépôt </a:t>
+            </a:r>
+            <a:r>
+              <a:rPr lang="fr-FR" dirty="0" err="1"/>
+              <a:t>Epitech</a:t>
+            </a:r>
+            <a:r>
+              <a:rPr lang="fr-FR" dirty="0"/>
+              <a:t>, branche main).</a:t>
+            </a:r>
+          </a:p>
+          <a:p>
+            <a:r>
+              <a:rPr lang="fr-FR" dirty="0"/>
+              <a:t>Ce fichier et le contrat d'API (docs/contrat_api.md) sont sur main depuis le 13 octobre.</a:t>
+            </a:r>
+          </a:p>
+          <a:p>
+            <a:r>
+              <a:rPr lang="fr-FR" dirty="0"/>
               <a:t>Les trois chiffres sont ceux des diapositives précédentes : aucun chiffre nouveau.</a:t>
             </a:r>
           </a:p>
@@ -946,28 +954,28 @@
           <a:lstStyle/>
           <a:p>
             <a:r>
-              <a:rPr lang="fr-FR"/>
-              <a:t>INTERVENANT : Axel · 45 s</a:t>
-            </a:r>
-          </a:p>
-          <a:p>
-            <a:endParaRPr lang="fr-FR"/>
-          </a:p>
-          <a:p>
-            <a:r>
-              <a:rPr lang="fr-FR"/>
+              <a:rPr lang="fr-FR" dirty="0"/>
+              <a:t>INTERVENANT : Yohan · 45 s</a:t>
+            </a:r>
+          </a:p>
+          <a:p>
+            <a:endParaRPr lang="fr-FR" dirty="0"/>
+          </a:p>
+          <a:p>
+            <a:r>
+              <a:rPr lang="fr-FR" dirty="0"/>
               <a:t>COMPLÉMENT</a:t>
             </a:r>
           </a:p>
           <a:p>
             <a:r>
-              <a:rPr lang="fr-FR"/>
+              <a:rPr lang="fr-FR" dirty="0"/>
               <a:t>Le premier point vient du sujet : les offres sont dispersées sur de nombreuses plateformes. Les deux autres sont le vécu de n'importe quel candidat : parler d'une expérience personnelle rend le constat concret.</a:t>
             </a:r>
           </a:p>
           <a:p>
             <a:r>
-              <a:rPr lang="fr-FR"/>
+              <a:rPr lang="fr-FR" dirty="0"/>
               <a:t>La phrase du bas est la promesse ; la diapositive suivante la tient.</a:t>
             </a:r>
           </a:p>
@@ -1304,7 +1312,7 @@
           <a:p>
             <a:r>
               <a:rPr lang="fr-FR"/>
-              <a:t>La diapositive la présente comme une capacité en place, sur décision de l'équipe.</a:t>
+              <a:t>La diapositive l'annonce comme à venir (« bientôt »).</a:t>
             </a:r>
           </a:p>
         </p:txBody>
@@ -1742,7 +1750,7 @@
           <a:p>
             <a:r>
               <a:rPr lang="fr-FR"/>
-              <a:t>Pourquoi ce parcours : une personne qui a candidaté sans compte a déjà une fiche. Sans vérification, connaître son adresse suffirait pour lire ses candidatures. Avec le lien, seul le propriétaire de la boîte mail ouvre le compte.</a:t>
+              <a:t>Pourquoi ce parcours : une personne qui a candidaté sans compte a déjà une fiche. Sans vérification, connaître son adresse suffirait pour lire ses candidatures. Avec le lien, seul le propriétaire de la boîte mail ouvre le compte. À l'inverse, une adresse encore inconnue crée le compte tout de suite, sans lien : il n'y a aucune candidature à protéger.</a:t>
             </a:r>
           </a:p>
           <a:p>
@@ -9618,7 +9626,7 @@
                 </a:solidFill>
                 <a:latin typeface="Manrope" pitchFamily="2" charset="0"/>
               </a:rPr>
-              <a:t>L’IA au service de notre l’équipe</a:t>
+              <a:t>L’IA au service de notre équipe</a:t>
             </a:r>
           </a:p>
         </p:txBody>
@@ -16571,7 +16579,7 @@
                 </a:solidFill>
                 <a:latin typeface="Manrope SemiBold" pitchFamily="2" charset="0"/>
               </a:rPr>
-              <a:t>, joint en un geste.</a:t>
+              <a:t>, bientôt joint en un geste.</a:t>
             </a:r>
           </a:p>
         </p:txBody>
@@ -23552,7 +23560,7 @@
                 </a:solidFill>
                 <a:latin typeface="Manrope" pitchFamily="2" charset="0"/>
               </a:rPr>
-              <a:t>17 routes, chacune avec ses codes et ses messages écrits à l'avance.</a:t>
+              <a:t>23 routes, chacune avec ses codes et ses messages écrits à l'avance.</a:t>
             </a:r>
           </a:p>
         </p:txBody>

--- a/docs/YIA_Jobs_soutenance.pptx
+++ b/docs/YIA_Jobs_soutenance.pptx
@@ -208,7 +208,7 @@
           <a:p>
             <a:fld id="{FD8A6968-F8A5-4117-883A-0C39BC6E68E7}" type="datetimeFigureOut">
               <a:rPr lang="fr-FR" smtClean="0"/>
-              <a:t>13/10/2026</a:t>
+              <a:t>14/10/2026</a:t>
             </a:fld>
             <a:endParaRPr lang="fr-FR"/>
           </a:p>
@@ -622,30 +622,45 @@
           <a:lstStyle/>
           <a:p>
             <a:r>
-              <a:rPr lang="fr-FR"/>
+              <a:rPr lang="fr-FR" dirty="0"/>
               <a:t>INTERVENANT : Axel · 45 s</a:t>
             </a:r>
           </a:p>
           <a:p>
-            <a:endParaRPr lang="fr-FR"/>
-          </a:p>
-          <a:p>
-            <a:r>
-              <a:rPr lang="fr-FR"/>
+            <a:endParaRPr lang="fr-FR" dirty="0"/>
+          </a:p>
+          <a:p>
+            <a:r>
+              <a:rPr lang="fr-FR" dirty="0"/>
               <a:t>COMPLÉMENT</a:t>
             </a:r>
           </a:p>
           <a:p>
             <a:r>
-              <a:rPr lang="fr-FR"/>
+              <a:rPr lang="fr-FR" dirty="0"/>
               <a:t>C'est le rythme réel du projet : chaque matin un document de tâches par personne, chaque soir les tests et la relecture, puis la fusion dans main et la mise à jour des dépôts. Le dire comme une capacité : le client demande, l'équipe livre.</a:t>
             </a:r>
           </a:p>
           <a:p>
             <a:r>
-              <a:rPr lang="fr-FR"/>
+              <a:rPr lang="fr-FR" dirty="0"/>
               <a:t>Pour l'encadrant : c'est ici que se montre la gestion de projet, sans raconter le chemin.</a:t>
             </a:r>
+          </a:p>
+          <a:p>
+            <a:r>
+              <a:rPr lang="fr-FR" dirty="0">
+                <a:sym typeface="Wingdings" panose="05000000000000000000" pitchFamily="2" charset="2"/>
+              </a:rPr>
+              <a:t> Prochainement onglet </a:t>
+            </a:r>
+            <a:r>
+              <a:rPr lang="fr-FR">
+                <a:sym typeface="Wingdings" panose="05000000000000000000" pitchFamily="2" charset="2"/>
+              </a:rPr>
+              <a:t>« nous contacter »</a:t>
+            </a:r>
+            <a:endParaRPr lang="fr-FR" dirty="0"/>
           </a:p>
         </p:txBody>
       </p:sp>
@@ -841,7 +856,7 @@
           </a:p>
           <a:p>
             <a:r>
-              <a:rPr lang="fr-FR"/>
+              <a:rPr lang="fr-FR" dirty="0"/>
               <a:t>COMPLÉMENT</a:t>
             </a:r>
           </a:p>
@@ -869,6 +884,23 @@
             <a:r>
               <a:rPr lang="fr-FR" dirty="0"/>
               <a:t>Les trois chiffres sont ceux des diapositives précédentes : aucun chiffre nouveau.</a:t>
+            </a:r>
+          </a:p>
+          <a:p>
+            <a:endParaRPr lang="fr-FR" dirty="0"/>
+          </a:p>
+          <a:p>
+            <a:r>
+              <a:rPr lang="fr-FR" dirty="0"/>
+              <a:t>entreprise@soutenance.com </a:t>
+            </a:r>
+            <a:r>
+              <a:rPr lang="fr-FR" dirty="0" err="1"/>
+              <a:t>mdp</a:t>
+            </a:r>
+            <a:r>
+              <a:rPr lang="fr-FR" dirty="0"/>
+              <a:t> a</a:t>
             </a:r>
           </a:p>
         </p:txBody>
@@ -1950,7 +1982,7 @@
           <a:p>
             <a:fld id="{B25980C9-7327-4AB2-AF60-70BAAFF4AD3D}" type="datetimeFigureOut">
               <a:rPr lang="fr-FR" smtClean="0"/>
-              <a:t>13/10/2026</a:t>
+              <a:t>14/10/2026</a:t>
             </a:fld>
             <a:endParaRPr lang="fr-FR"/>
           </a:p>
@@ -2148,7 +2180,7 @@
           <a:p>
             <a:fld id="{B25980C9-7327-4AB2-AF60-70BAAFF4AD3D}" type="datetimeFigureOut">
               <a:rPr lang="fr-FR" smtClean="0"/>
-              <a:t>13/10/2026</a:t>
+              <a:t>14/10/2026</a:t>
             </a:fld>
             <a:endParaRPr lang="fr-FR"/>
           </a:p>
@@ -2356,7 +2388,7 @@
           <a:p>
             <a:fld id="{B25980C9-7327-4AB2-AF60-70BAAFF4AD3D}" type="datetimeFigureOut">
               <a:rPr lang="fr-FR" smtClean="0"/>
-              <a:t>13/10/2026</a:t>
+              <a:t>14/10/2026</a:t>
             </a:fld>
             <a:endParaRPr lang="fr-FR"/>
           </a:p>
@@ -2554,7 +2586,7 @@
           <a:p>
             <a:fld id="{B25980C9-7327-4AB2-AF60-70BAAFF4AD3D}" type="datetimeFigureOut">
               <a:rPr lang="fr-FR" smtClean="0"/>
-              <a:t>13/10/2026</a:t>
+              <a:t>14/10/2026</a:t>
             </a:fld>
             <a:endParaRPr lang="fr-FR"/>
           </a:p>
@@ -2829,7 +2861,7 @@
           <a:p>
             <a:fld id="{B25980C9-7327-4AB2-AF60-70BAAFF4AD3D}" type="datetimeFigureOut">
               <a:rPr lang="fr-FR" smtClean="0"/>
-              <a:t>13/10/2026</a:t>
+              <a:t>14/10/2026</a:t>
             </a:fld>
             <a:endParaRPr lang="fr-FR"/>
           </a:p>
@@ -3094,7 +3126,7 @@
           <a:p>
             <a:fld id="{B25980C9-7327-4AB2-AF60-70BAAFF4AD3D}" type="datetimeFigureOut">
               <a:rPr lang="fr-FR" smtClean="0"/>
-              <a:t>13/10/2026</a:t>
+              <a:t>14/10/2026</a:t>
             </a:fld>
             <a:endParaRPr lang="fr-FR"/>
           </a:p>
@@ -3506,7 +3538,7 @@
           <a:p>
             <a:fld id="{B25980C9-7327-4AB2-AF60-70BAAFF4AD3D}" type="datetimeFigureOut">
               <a:rPr lang="fr-FR" smtClean="0"/>
-              <a:t>13/10/2026</a:t>
+              <a:t>14/10/2026</a:t>
             </a:fld>
             <a:endParaRPr lang="fr-FR"/>
           </a:p>
@@ -3647,7 +3679,7 @@
           <a:p>
             <a:fld id="{B25980C9-7327-4AB2-AF60-70BAAFF4AD3D}" type="datetimeFigureOut">
               <a:rPr lang="fr-FR" smtClean="0"/>
-              <a:t>13/10/2026</a:t>
+              <a:t>14/10/2026</a:t>
             </a:fld>
             <a:endParaRPr lang="fr-FR"/>
           </a:p>
@@ -3760,7 +3792,7 @@
           <a:p>
             <a:fld id="{B25980C9-7327-4AB2-AF60-70BAAFF4AD3D}" type="datetimeFigureOut">
               <a:rPr lang="fr-FR" smtClean="0"/>
-              <a:t>13/10/2026</a:t>
+              <a:t>14/10/2026</a:t>
             </a:fld>
             <a:endParaRPr lang="fr-FR"/>
           </a:p>
@@ -4071,7 +4103,7 @@
           <a:p>
             <a:fld id="{B25980C9-7327-4AB2-AF60-70BAAFF4AD3D}" type="datetimeFigureOut">
               <a:rPr lang="fr-FR" smtClean="0"/>
-              <a:t>13/10/2026</a:t>
+              <a:t>14/10/2026</a:t>
             </a:fld>
             <a:endParaRPr lang="fr-FR"/>
           </a:p>
@@ -4359,7 +4391,7 @@
           <a:p>
             <a:fld id="{B25980C9-7327-4AB2-AF60-70BAAFF4AD3D}" type="datetimeFigureOut">
               <a:rPr lang="fr-FR" smtClean="0"/>
-              <a:t>13/10/2026</a:t>
+              <a:t>14/10/2026</a:t>
             </a:fld>
             <a:endParaRPr lang="fr-FR"/>
           </a:p>
@@ -4600,7 +4632,7 @@
           <a:p>
             <a:fld id="{B25980C9-7327-4AB2-AF60-70BAAFF4AD3D}" type="datetimeFigureOut">
               <a:rPr lang="fr-FR" smtClean="0"/>
-              <a:t>13/10/2026</a:t>
+              <a:t>14/10/2026</a:t>
             </a:fld>
             <a:endParaRPr lang="fr-FR"/>
           </a:p>

--- a/docs/YIA_Jobs_soutenance.pptx
+++ b/docs/YIA_Jobs_soutenance.pptx
@@ -4912,7 +4912,7 @@
     <p:bg>
       <p:bgPr>
         <a:solidFill>
-          <a:srgbClr val="0B1016"/>
+          <a:srgbClr val="F7F9FB"/>
         </a:solidFill>
         <a:effectLst/>
       </p:bgPr>
@@ -4967,7 +4967,7 @@
             <a:r>
               <a:rPr lang="fr-FR" sz="2000">
                 <a:solidFill>
-                  <a:srgbClr val="F2F5F8"/>
+                  <a:srgbClr val="1D1D1F"/>
                 </a:solidFill>
                 <a:latin typeface="Manrope SemiBold" pitchFamily="2" charset="0"/>
               </a:rPr>
@@ -4976,7 +4976,7 @@
             <a:r>
               <a:rPr lang="fr-FR" sz="2000">
                 <a:solidFill>
-                  <a:srgbClr val="A9CCE3"/>
+                  <a:srgbClr val="24577A"/>
                 </a:solidFill>
                 <a:latin typeface="Manrope SemiBold" pitchFamily="2" charset="0"/>
               </a:rPr>
@@ -4985,7 +4985,7 @@
             <a:r>
               <a:rPr lang="fr-FR" sz="2000">
                 <a:solidFill>
-                  <a:srgbClr val="F2F5F8"/>
+                  <a:srgbClr val="1D1D1F"/>
                 </a:solidFill>
                 <a:latin typeface="Manrope SemiBold" pitchFamily="2" charset="0"/>
               </a:rPr>
@@ -5025,7 +5025,7 @@
             <a:r>
               <a:rPr lang="fr-FR" sz="5800" spc="-100">
                 <a:solidFill>
-                  <a:srgbClr val="F2F5F8"/>
+                  <a:srgbClr val="1D1D1F"/>
                 </a:solidFill>
                 <a:latin typeface="Manrope SemiBold" pitchFamily="2" charset="0"/>
               </a:rPr>
@@ -5036,7 +5036,7 @@
             <a:r>
               <a:rPr lang="fr-FR" sz="5800" spc="-100">
                 <a:solidFill>
-                  <a:srgbClr val="F2F5F8"/>
+                  <a:srgbClr val="1D1D1F"/>
                 </a:solidFill>
                 <a:latin typeface="Manrope SemiBold" pitchFamily="2" charset="0"/>
               </a:rPr>
@@ -5047,10 +5047,10 @@
                 <a:gradFill flip="none" rotWithShape="1">
                   <a:gsLst>
                     <a:gs pos="0">
-                      <a:srgbClr val="5A93BF"/>
+                      <a:srgbClr val="24577A"/>
                     </a:gs>
                     <a:gs pos="100000">
-                      <a:srgbClr val="A9CCE3"/>
+                      <a:srgbClr val="24577A"/>
                     </a:gs>
                   </a:gsLst>
                   <a:lin ang="0" scaled="1"/>
@@ -5063,7 +5063,7 @@
             <a:r>
               <a:rPr lang="fr-FR" sz="5800" spc="-100">
                 <a:solidFill>
-                  <a:srgbClr val="F2F5F8"/>
+                  <a:srgbClr val="1D1D1F"/>
                 </a:solidFill>
                 <a:latin typeface="Manrope SemiBold" pitchFamily="2" charset="0"/>
               </a:rPr>
@@ -5108,7 +5108,7 @@
             <a:r>
               <a:rPr lang="fr-FR" sz="1400">
                 <a:solidFill>
-                  <a:srgbClr val="9CA9B6"/>
+                  <a:srgbClr val="5F6B76"/>
                 </a:solidFill>
                 <a:latin typeface="Manrope" pitchFamily="2" charset="0"/>
               </a:rPr>
@@ -5153,7 +5153,7 @@
             <a:r>
               <a:rPr lang="fr-FR" sz="1400">
                 <a:solidFill>
-                  <a:srgbClr val="F2F5F8"/>
+                  <a:srgbClr val="1D1D1F"/>
                 </a:solidFill>
                 <a:latin typeface="Manrope Medium" pitchFamily="2" charset="0"/>
               </a:rPr>
@@ -5390,7 +5390,7 @@
     <p:bg>
       <p:bgPr>
         <a:solidFill>
-          <a:srgbClr val="0B1016"/>
+          <a:srgbClr val="F7F9FB"/>
         </a:solidFill>
         <a:effectLst/>
       </p:bgPr>
@@ -5445,7 +5445,7 @@
             <a:r>
               <a:rPr lang="fr-FR" sz="1100" spc="260">
                 <a:solidFill>
-                  <a:srgbClr val="A9CCE3"/>
+                  <a:srgbClr val="24577A"/>
                 </a:solidFill>
                 <a:latin typeface="Manrope SemiBold" pitchFamily="2" charset="0"/>
               </a:rPr>
@@ -5485,7 +5485,7 @@
             <a:r>
               <a:rPr lang="fr-FR" sz="3600" spc="-50">
                 <a:solidFill>
-                  <a:srgbClr val="F2F5F8"/>
+                  <a:srgbClr val="1D1D1F"/>
                 </a:solidFill>
                 <a:latin typeface="Manrope SemiBold" pitchFamily="2" charset="0"/>
               </a:rPr>
@@ -5496,10 +5496,10 @@
                 <a:gradFill flip="none" rotWithShape="1">
                   <a:gsLst>
                     <a:gs pos="0">
-                      <a:srgbClr val="5A93BF"/>
+                      <a:srgbClr val="24577A"/>
                     </a:gs>
                     <a:gs pos="100000">
-                      <a:srgbClr val="A9CCE3"/>
+                      <a:srgbClr val="24577A"/>
                     </a:gs>
                   </a:gsLst>
                   <a:lin ang="0" scaled="1"/>
@@ -5512,7 +5512,7 @@
             <a:r>
               <a:rPr lang="fr-FR" sz="3600" spc="-50">
                 <a:solidFill>
-                  <a:srgbClr val="F2F5F8"/>
+                  <a:srgbClr val="1D1D1F"/>
                 </a:solidFill>
                 <a:latin typeface="Manrope SemiBold" pitchFamily="2" charset="0"/>
               </a:rPr>
@@ -5557,7 +5557,7 @@
             <a:r>
               <a:rPr lang="fr-FR" sz="1500">
                 <a:solidFill>
-                  <a:srgbClr val="A9CCE3"/>
+                  <a:srgbClr val="24577A"/>
                 </a:solidFill>
                 <a:latin typeface="Manrope SemiBold" pitchFamily="2" charset="0"/>
               </a:rPr>
@@ -5602,7 +5602,7 @@
             <a:r>
               <a:rPr lang="fr-FR" sz="2100">
                 <a:solidFill>
-                  <a:srgbClr val="F2F5F8"/>
+                  <a:srgbClr val="1D1D1F"/>
                 </a:solidFill>
                 <a:latin typeface="Manrope Medium" pitchFamily="2" charset="0"/>
               </a:rPr>
@@ -5632,7 +5632,7 @@
             <a:avLst/>
           </a:prstGeom>
           <a:solidFill>
-            <a:srgbClr val="243040"/>
+            <a:srgbClr val="E2E8ED"/>
           </a:solidFill>
           <a:ln w="19050" cap="flat" cmpd="sng" algn="ctr">
             <a:noFill/>
@@ -5715,7 +5715,7 @@
             <a:r>
               <a:rPr lang="fr-FR" sz="1500">
                 <a:solidFill>
-                  <a:srgbClr val="A9CCE3"/>
+                  <a:srgbClr val="24577A"/>
                 </a:solidFill>
                 <a:latin typeface="Manrope SemiBold" pitchFamily="2" charset="0"/>
               </a:rPr>
@@ -5760,7 +5760,7 @@
             <a:r>
               <a:rPr lang="fr-FR" sz="2100">
                 <a:solidFill>
-                  <a:srgbClr val="F2F5F8"/>
+                  <a:srgbClr val="1D1D1F"/>
                 </a:solidFill>
                 <a:latin typeface="Manrope Medium" pitchFamily="2" charset="0"/>
               </a:rPr>
@@ -5790,7 +5790,7 @@
             <a:avLst/>
           </a:prstGeom>
           <a:solidFill>
-            <a:srgbClr val="243040"/>
+            <a:srgbClr val="E2E8ED"/>
           </a:solidFill>
           <a:ln w="19050" cap="flat" cmpd="sng" algn="ctr">
             <a:noFill/>
@@ -5873,7 +5873,7 @@
             <a:r>
               <a:rPr lang="fr-FR" sz="1500">
                 <a:solidFill>
-                  <a:srgbClr val="A9CCE3"/>
+                  <a:srgbClr val="24577A"/>
                 </a:solidFill>
                 <a:latin typeface="Manrope SemiBold" pitchFamily="2" charset="0"/>
               </a:rPr>
@@ -5918,7 +5918,7 @@
             <a:r>
               <a:rPr lang="fr-FR" sz="2100">
                 <a:solidFill>
-                  <a:srgbClr val="F2F5F8"/>
+                  <a:srgbClr val="1D1D1F"/>
                 </a:solidFill>
                 <a:latin typeface="Manrope Medium" pitchFamily="2" charset="0"/>
               </a:rPr>
@@ -5948,7 +5948,7 @@
             <a:avLst/>
           </a:prstGeom>
           <a:solidFill>
-            <a:srgbClr val="243040"/>
+            <a:srgbClr val="E2E8ED"/>
           </a:solidFill>
           <a:ln w="19050" cap="flat" cmpd="sng" algn="ctr">
             <a:noFill/>
@@ -6031,7 +6031,7 @@
             <a:r>
               <a:rPr lang="fr-FR" sz="1500">
                 <a:solidFill>
-                  <a:srgbClr val="A9CCE3"/>
+                  <a:srgbClr val="24577A"/>
                 </a:solidFill>
                 <a:latin typeface="Manrope SemiBold" pitchFamily="2" charset="0"/>
               </a:rPr>
@@ -6076,7 +6076,7 @@
             <a:r>
               <a:rPr lang="fr-FR" sz="2100">
                 <a:solidFill>
-                  <a:srgbClr val="F2F5F8"/>
+                  <a:srgbClr val="1D1D1F"/>
                 </a:solidFill>
                 <a:latin typeface="Manrope Medium" pitchFamily="2" charset="0"/>
               </a:rPr>
@@ -6106,7 +6106,7 @@
             <a:avLst/>
           </a:prstGeom>
           <a:solidFill>
-            <a:srgbClr val="243040"/>
+            <a:srgbClr val="E2E8ED"/>
           </a:solidFill>
           <a:ln w="19050" cap="flat" cmpd="sng" algn="ctr">
             <a:noFill/>
@@ -6189,7 +6189,7 @@
             <a:r>
               <a:rPr lang="fr-FR" sz="1500">
                 <a:solidFill>
-                  <a:srgbClr val="A9CCE3"/>
+                  <a:srgbClr val="24577A"/>
                 </a:solidFill>
                 <a:latin typeface="Manrope SemiBold" pitchFamily="2" charset="0"/>
               </a:rPr>
@@ -6234,7 +6234,7 @@
             <a:r>
               <a:rPr lang="fr-FR" sz="2100">
                 <a:solidFill>
-                  <a:srgbClr val="F2F5F8"/>
+                  <a:srgbClr val="1D1D1F"/>
                 </a:solidFill>
                 <a:latin typeface="Manrope Medium" pitchFamily="2" charset="0"/>
               </a:rPr>
@@ -6264,7 +6264,7 @@
             <a:avLst/>
           </a:prstGeom>
           <a:solidFill>
-            <a:srgbClr val="243040"/>
+            <a:srgbClr val="E2E8ED"/>
           </a:solidFill>
           <a:ln w="19050" cap="flat" cmpd="sng" algn="ctr">
             <a:noFill/>
@@ -7007,7 +7007,7 @@
     <p:bg>
       <p:bgPr>
         <a:solidFill>
-          <a:srgbClr val="0B1016"/>
+          <a:srgbClr val="F7F9FB"/>
         </a:solidFill>
         <a:effectLst/>
       </p:bgPr>
@@ -7062,7 +7062,7 @@
             <a:r>
               <a:rPr lang="fr-FR" sz="1100" spc="260">
                 <a:solidFill>
-                  <a:srgbClr val="A9CCE3"/>
+                  <a:srgbClr val="24577A"/>
                 </a:solidFill>
                 <a:latin typeface="Manrope SemiBold" pitchFamily="2" charset="0"/>
               </a:rPr>
@@ -7102,7 +7102,7 @@
             <a:r>
               <a:rPr lang="fr-FR" sz="3600" spc="-50" dirty="0">
                 <a:solidFill>
-                  <a:srgbClr val="F2F5F8"/>
+                  <a:srgbClr val="1D1D1F"/>
                 </a:solidFill>
                 <a:latin typeface="Manrope SemiBold" pitchFamily="2" charset="0"/>
               </a:rPr>
@@ -7113,10 +7113,10 @@
                 <a:gradFill flip="none" rotWithShape="1">
                   <a:gsLst>
                     <a:gs pos="0">
-                      <a:srgbClr val="5A93BF"/>
+                      <a:srgbClr val="24577A"/>
                     </a:gs>
                     <a:gs pos="100000">
-                      <a:srgbClr val="A9CCE3"/>
+                      <a:srgbClr val="24577A"/>
                     </a:gs>
                   </a:gsLst>
                   <a:lin ang="0" scaled="1"/>
@@ -7129,7 +7129,7 @@
             <a:r>
               <a:rPr lang="fr-FR" sz="3600" spc="-50" dirty="0">
                 <a:solidFill>
-                  <a:srgbClr val="F2F5F8"/>
+                  <a:srgbClr val="1D1D1F"/>
                 </a:solidFill>
                 <a:latin typeface="Manrope SemiBold" pitchFamily="2" charset="0"/>
               </a:rPr>
@@ -7169,7 +7169,7 @@
             <a:r>
               <a:rPr lang="fr-FR" sz="4800" dirty="0">
                 <a:solidFill>
-                  <a:srgbClr val="F2F5F8"/>
+                  <a:srgbClr val="1D1D1F"/>
                 </a:solidFill>
                 <a:latin typeface="Manrope SemiBold" pitchFamily="2" charset="0"/>
               </a:rPr>
@@ -7214,7 +7214,7 @@
             <a:r>
               <a:rPr lang="fr-FR" sz="1600" dirty="0">
                 <a:solidFill>
-                  <a:srgbClr val="A9CCE3"/>
+                  <a:srgbClr val="24577A"/>
                 </a:solidFill>
                 <a:latin typeface="Manrope Medium" pitchFamily="2" charset="0"/>
               </a:rPr>
@@ -7258,7 +7258,7 @@
             </a:pPr>
             <a:endParaRPr lang="fr-FR" sz="1200" dirty="0">
               <a:solidFill>
-                <a:srgbClr val="9CA9B6"/>
+                <a:srgbClr val="5F6B76"/>
               </a:solidFill>
               <a:latin typeface="Manrope" pitchFamily="2" charset="0"/>
             </a:endParaRPr>
@@ -7295,7 +7295,7 @@
           <a:p>
             <a:endParaRPr lang="fr-FR" sz="4800" dirty="0">
               <a:solidFill>
-                <a:srgbClr val="F2F5F8"/>
+                <a:srgbClr val="1D1D1F"/>
               </a:solidFill>
               <a:latin typeface="Manrope SemiBold" pitchFamily="2" charset="0"/>
             </a:endParaRPr>
@@ -7338,7 +7338,7 @@
             <a:r>
               <a:rPr lang="fr-FR" sz="2000" dirty="0">
                 <a:solidFill>
-                  <a:srgbClr val="A9CCE3"/>
+                  <a:srgbClr val="24577A"/>
                 </a:solidFill>
                 <a:latin typeface="Manrope Medium" pitchFamily="2" charset="0"/>
               </a:rPr>
@@ -7383,7 +7383,7 @@
             <a:r>
               <a:rPr lang="fr-FR" sz="1200" dirty="0">
                 <a:solidFill>
-                  <a:srgbClr val="9CA9B6"/>
+                  <a:srgbClr val="5F6B76"/>
                 </a:solidFill>
                 <a:latin typeface="Manrope" pitchFamily="2" charset="0"/>
               </a:rPr>
@@ -7422,7 +7422,7 @@
           <a:p>
             <a:endParaRPr lang="fr-FR" sz="4800" dirty="0">
               <a:solidFill>
-                <a:srgbClr val="F2F5F8"/>
+                <a:srgbClr val="1D1D1F"/>
               </a:solidFill>
               <a:latin typeface="Manrope SemiBold" pitchFamily="2" charset="0"/>
             </a:endParaRPr>
@@ -7465,7 +7465,7 @@
               </a:lnSpc>
               <a:defRPr sz="2000">
                 <a:solidFill>
-                  <a:srgbClr val="A9CCE3"/>
+                  <a:srgbClr val="24577A"/>
                 </a:solidFill>
                 <a:latin typeface="Manrope Medium" pitchFamily="2" charset="0"/>
               </a:defRPr>
@@ -7515,7 +7515,7 @@
             <a:r>
               <a:rPr lang="fr-FR" sz="1200" dirty="0">
                 <a:solidFill>
-                  <a:srgbClr val="9CA9B6"/>
+                  <a:srgbClr val="5F6B76"/>
                 </a:solidFill>
                 <a:latin typeface="Manrope" pitchFamily="2" charset="0"/>
               </a:rPr>
@@ -7548,11 +7548,11 @@
             </a:avLst>
           </a:prstGeom>
           <a:solidFill>
-            <a:srgbClr val="182330"/>
+            <a:srgbClr val="F0F5F8"/>
           </a:solidFill>
           <a:ln w="9525">
             <a:solidFill>
-              <a:srgbClr val="243040"/>
+              <a:srgbClr val="E2E8ED"/>
             </a:solidFill>
           </a:ln>
         </p:spPr>
@@ -7603,7 +7603,7 @@
             <a:avLst/>
           </a:prstGeom>
           <a:solidFill>
-            <a:srgbClr val="A9CCE3"/>
+            <a:srgbClr val="24577A"/>
           </a:solidFill>
           <a:ln w="19050" cap="flat" cmpd="sng" algn="ctr">
             <a:noFill/>
@@ -7687,7 +7687,7 @@
             <a:r>
               <a:rPr lang="fr-FR" sz="1900">
                 <a:solidFill>
-                  <a:srgbClr val="F2F5F8"/>
+                  <a:srgbClr val="1D1D1F"/>
                 </a:solidFill>
                 <a:latin typeface="Manrope Medium" pitchFamily="2" charset="0"/>
               </a:rPr>
@@ -7733,7 +7733,7 @@
             <a:r>
               <a:rPr lang="fr-FR" sz="1350">
                 <a:solidFill>
-                  <a:srgbClr val="9CA9B6"/>
+                  <a:srgbClr val="5F6B76"/>
                 </a:solidFill>
                 <a:latin typeface="Manrope" pitchFamily="2" charset="0"/>
               </a:rPr>
@@ -7779,7 +7779,7 @@
             <a:r>
               <a:rPr lang="fr-FR" sz="1050">
                 <a:solidFill>
-                  <a:srgbClr val="A9CCE3"/>
+                  <a:srgbClr val="24577A"/>
                 </a:solidFill>
                 <a:latin typeface="Manrope" pitchFamily="2" charset="0"/>
               </a:rPr>
@@ -8463,7 +8463,7 @@
     <p:bg>
       <p:bgPr>
         <a:solidFill>
-          <a:srgbClr val="0B1016"/>
+          <a:srgbClr val="F7F9FB"/>
         </a:solidFill>
         <a:effectLst/>
       </p:bgPr>
@@ -8518,7 +8518,7 @@
             <a:r>
               <a:rPr lang="fr-FR" sz="1100" spc="260">
                 <a:solidFill>
-                  <a:srgbClr val="A9CCE3"/>
+                  <a:srgbClr val="24577A"/>
                 </a:solidFill>
                 <a:latin typeface="Manrope SemiBold" pitchFamily="2" charset="0"/>
               </a:rPr>
@@ -8558,7 +8558,7 @@
             <a:r>
               <a:rPr lang="fr-FR" sz="3600" spc="-50">
                 <a:solidFill>
-                  <a:srgbClr val="F2F5F8"/>
+                  <a:srgbClr val="1D1D1F"/>
                 </a:solidFill>
                 <a:latin typeface="Manrope SemiBold" pitchFamily="2" charset="0"/>
               </a:rPr>
@@ -8569,10 +8569,10 @@
                 <a:gradFill flip="none" rotWithShape="1">
                   <a:gsLst>
                     <a:gs pos="0">
-                      <a:srgbClr val="5A93BF"/>
+                      <a:srgbClr val="24577A"/>
                     </a:gs>
                     <a:gs pos="100000">
-                      <a:srgbClr val="A9CCE3"/>
+                      <a:srgbClr val="24577A"/>
                     </a:gs>
                   </a:gsLst>
                   <a:lin ang="0" scaled="1"/>
@@ -8585,7 +8585,7 @@
             <a:r>
               <a:rPr lang="fr-FR" sz="3600" spc="-50">
                 <a:solidFill>
-                  <a:srgbClr val="F2F5F8"/>
+                  <a:srgbClr val="1D1D1F"/>
                 </a:solidFill>
                 <a:latin typeface="Manrope SemiBold" pitchFamily="2" charset="0"/>
               </a:rPr>
@@ -8615,7 +8615,7 @@
             <a:avLst/>
           </a:prstGeom>
           <a:solidFill>
-            <a:srgbClr val="A9CCE3"/>
+            <a:srgbClr val="24577A"/>
           </a:solidFill>
           <a:ln w="19050" cap="flat" cmpd="sng" algn="ctr">
             <a:noFill/>
@@ -8698,7 +8698,7 @@
             <a:r>
               <a:rPr lang="fr-FR" sz="2400">
                 <a:solidFill>
-                  <a:srgbClr val="F2F5F8"/>
+                  <a:srgbClr val="1D1D1F"/>
                 </a:solidFill>
                 <a:latin typeface="Manrope SemiBold" pitchFamily="2" charset="0"/>
               </a:rPr>
@@ -8743,7 +8743,7 @@
             <a:r>
               <a:rPr lang="fr-FR" sz="1400">
                 <a:solidFill>
-                  <a:srgbClr val="9CA9B6"/>
+                  <a:srgbClr val="5F6B76"/>
                 </a:solidFill>
                 <a:latin typeface="Manrope" pitchFamily="2" charset="0"/>
               </a:rPr>
@@ -8773,7 +8773,7 @@
             <a:avLst/>
           </a:prstGeom>
           <a:solidFill>
-            <a:srgbClr val="A9CCE3"/>
+            <a:srgbClr val="24577A"/>
           </a:solidFill>
           <a:ln w="19050" cap="flat" cmpd="sng" algn="ctr">
             <a:noFill/>
@@ -8856,7 +8856,7 @@
             <a:r>
               <a:rPr lang="fr-FR" sz="2400">
                 <a:solidFill>
-                  <a:srgbClr val="F2F5F8"/>
+                  <a:srgbClr val="1D1D1F"/>
                 </a:solidFill>
                 <a:latin typeface="Manrope SemiBold" pitchFamily="2" charset="0"/>
               </a:rPr>
@@ -8901,7 +8901,7 @@
             <a:r>
               <a:rPr lang="fr-FR" sz="1400">
                 <a:solidFill>
-                  <a:srgbClr val="9CA9B6"/>
+                  <a:srgbClr val="5F6B76"/>
                 </a:solidFill>
                 <a:latin typeface="Manrope" pitchFamily="2" charset="0"/>
               </a:rPr>
@@ -8931,7 +8931,7 @@
             <a:avLst/>
           </a:prstGeom>
           <a:solidFill>
-            <a:srgbClr val="A9CCE3"/>
+            <a:srgbClr val="24577A"/>
           </a:solidFill>
           <a:ln w="19050" cap="flat" cmpd="sng" algn="ctr">
             <a:noFill/>
@@ -9014,7 +9014,7 @@
             <a:r>
               <a:rPr lang="fr-FR" sz="2400">
                 <a:solidFill>
-                  <a:srgbClr val="F2F5F8"/>
+                  <a:srgbClr val="1D1D1F"/>
                 </a:solidFill>
                 <a:latin typeface="Manrope SemiBold" pitchFamily="2" charset="0"/>
               </a:rPr>
@@ -9059,7 +9059,7 @@
             <a:r>
               <a:rPr lang="fr-FR" sz="1400">
                 <a:solidFill>
-                  <a:srgbClr val="9CA9B6"/>
+                  <a:srgbClr val="5F6B76"/>
                 </a:solidFill>
                 <a:latin typeface="Manrope" pitchFamily="2" charset="0"/>
               </a:rPr>
@@ -9104,7 +9104,7 @@
             <a:r>
               <a:rPr lang="fr-FR" sz="2000">
                 <a:solidFill>
-                  <a:srgbClr val="A9CCE3"/>
+                  <a:srgbClr val="24577A"/>
                 </a:solidFill>
                 <a:latin typeface="Manrope Medium" pitchFamily="2" charset="0"/>
               </a:rPr>
@@ -9629,7 +9629,7 @@
     <p:bg>
       <p:bgPr>
         <a:solidFill>
-          <a:srgbClr val="0B1016"/>
+          <a:srgbClr val="F7F9FB"/>
         </a:solidFill>
         <a:effectLst/>
       </p:bgPr>
@@ -9684,7 +9684,7 @@
             <a:r>
               <a:rPr lang="fr-FR" sz="1100" spc="260">
                 <a:solidFill>
-                  <a:srgbClr val="A9CCE3"/>
+                  <a:srgbClr val="24577A"/>
                 </a:solidFill>
                 <a:latin typeface="Manrope SemiBold" pitchFamily="2" charset="0"/>
               </a:rPr>
@@ -9724,7 +9724,7 @@
             <a:r>
               <a:rPr lang="fr-FR" sz="3600" spc="-50">
                 <a:solidFill>
-                  <a:srgbClr val="F2F5F8"/>
+                  <a:srgbClr val="1D1D1F"/>
                 </a:solidFill>
                 <a:latin typeface="Manrope SemiBold" pitchFamily="2" charset="0"/>
               </a:rPr>
@@ -9735,10 +9735,10 @@
                 <a:gradFill flip="none" rotWithShape="1">
                   <a:gsLst>
                     <a:gs pos="0">
-                      <a:srgbClr val="5A93BF"/>
+                      <a:srgbClr val="24577A"/>
                     </a:gs>
                     <a:gs pos="100000">
-                      <a:srgbClr val="A9CCE3"/>
+                      <a:srgbClr val="24577A"/>
                     </a:gs>
                   </a:gsLst>
                   <a:lin ang="0" scaled="1"/>
@@ -9751,7 +9751,7 @@
             <a:r>
               <a:rPr lang="fr-FR" sz="3600" spc="-50">
                 <a:solidFill>
-                  <a:srgbClr val="F2F5F8"/>
+                  <a:srgbClr val="1D1D1F"/>
                 </a:solidFill>
                 <a:latin typeface="Manrope SemiBold" pitchFamily="2" charset="0"/>
               </a:rPr>
@@ -9781,7 +9781,7 @@
             <a:avLst/>
           </a:prstGeom>
           <a:solidFill>
-            <a:srgbClr val="A9CCE3"/>
+            <a:srgbClr val="24577A"/>
           </a:solidFill>
           <a:ln w="19050" cap="flat" cmpd="sng" algn="ctr">
             <a:noFill/>
@@ -9864,7 +9864,7 @@
             <a:r>
               <a:rPr lang="fr-FR" sz="1900">
                 <a:solidFill>
-                  <a:srgbClr val="F2F5F8"/>
+                  <a:srgbClr val="1D1D1F"/>
                 </a:solidFill>
                 <a:latin typeface="Manrope Medium" pitchFamily="2" charset="0"/>
               </a:rPr>
@@ -9909,7 +9909,7 @@
             <a:r>
               <a:rPr lang="fr-FR" sz="1350">
                 <a:solidFill>
-                  <a:srgbClr val="9CA9B6"/>
+                  <a:srgbClr val="5F6B76"/>
                 </a:solidFill>
                 <a:latin typeface="Manrope" pitchFamily="2" charset="0"/>
               </a:rPr>
@@ -9939,7 +9939,7 @@
             <a:avLst/>
           </a:prstGeom>
           <a:solidFill>
-            <a:srgbClr val="A9CCE3"/>
+            <a:srgbClr val="24577A"/>
           </a:solidFill>
           <a:ln w="19050" cap="flat" cmpd="sng" algn="ctr">
             <a:noFill/>
@@ -10022,7 +10022,7 @@
             <a:r>
               <a:rPr lang="fr-FR" sz="1900">
                 <a:solidFill>
-                  <a:srgbClr val="F2F5F8"/>
+                  <a:srgbClr val="1D1D1F"/>
                 </a:solidFill>
                 <a:latin typeface="Manrope Medium" pitchFamily="2" charset="0"/>
               </a:rPr>
@@ -10067,7 +10067,7 @@
             <a:r>
               <a:rPr lang="fr-FR" sz="1350">
                 <a:solidFill>
-                  <a:srgbClr val="9CA9B6"/>
+                  <a:srgbClr val="5F6B76"/>
                 </a:solidFill>
                 <a:latin typeface="Manrope" pitchFamily="2" charset="0"/>
               </a:rPr>
@@ -10097,7 +10097,7 @@
             <a:avLst/>
           </a:prstGeom>
           <a:solidFill>
-            <a:srgbClr val="A9CCE3"/>
+            <a:srgbClr val="24577A"/>
           </a:solidFill>
           <a:ln w="19050" cap="flat" cmpd="sng" algn="ctr">
             <a:noFill/>
@@ -10180,7 +10180,7 @@
             <a:r>
               <a:rPr lang="fr-FR" sz="1900">
                 <a:solidFill>
-                  <a:srgbClr val="F2F5F8"/>
+                  <a:srgbClr val="1D1D1F"/>
                 </a:solidFill>
                 <a:latin typeface="Manrope Medium" pitchFamily="2" charset="0"/>
               </a:rPr>
@@ -10225,7 +10225,7 @@
             <a:r>
               <a:rPr lang="fr-FR" sz="1350">
                 <a:solidFill>
-                  <a:srgbClr val="9CA9B6"/>
+                  <a:srgbClr val="5F6B76"/>
                 </a:solidFill>
                 <a:latin typeface="Manrope" pitchFamily="2" charset="0"/>
               </a:rPr>
@@ -10270,7 +10270,7 @@
           </a:prstGeom>
           <a:ln w="9525">
             <a:solidFill>
-              <a:srgbClr val="D0D0D0"/>
+              <a:srgbClr val="E2E8ED"/>
             </a:solidFill>
           </a:ln>
         </p:spPr>
@@ -10755,7 +10755,7 @@
     <p:bg>
       <p:bgPr>
         <a:solidFill>
-          <a:srgbClr val="0B1016"/>
+          <a:srgbClr val="F7F9FB"/>
         </a:solidFill>
         <a:effectLst/>
       </p:bgPr>
@@ -10810,7 +10810,7 @@
             <a:r>
               <a:rPr lang="fr-FR" sz="1100" spc="260">
                 <a:solidFill>
-                  <a:srgbClr val="A9CCE3"/>
+                  <a:srgbClr val="24577A"/>
                 </a:solidFill>
                 <a:latin typeface="Manrope SemiBold" pitchFamily="2" charset="0"/>
               </a:rPr>
@@ -10850,7 +10850,7 @@
             <a:r>
               <a:rPr lang="fr-FR" sz="3600" spc="-50">
                 <a:solidFill>
-                  <a:srgbClr val="F2F5F8"/>
+                  <a:srgbClr val="1D1D1F"/>
                 </a:solidFill>
                 <a:latin typeface="Manrope SemiBold" pitchFamily="2" charset="0"/>
               </a:rPr>
@@ -10861,10 +10861,10 @@
                 <a:gradFill flip="none" rotWithShape="1">
                   <a:gsLst>
                     <a:gs pos="0">
-                      <a:srgbClr val="5A93BF"/>
+                      <a:srgbClr val="24577A"/>
                     </a:gs>
                     <a:gs pos="100000">
-                      <a:srgbClr val="A9CCE3"/>
+                      <a:srgbClr val="24577A"/>
                     </a:gs>
                   </a:gsLst>
                   <a:lin ang="0" scaled="1"/>
@@ -10877,7 +10877,7 @@
             <a:r>
               <a:rPr lang="fr-FR" sz="3600" spc="-50">
                 <a:solidFill>
-                  <a:srgbClr val="F2F5F8"/>
+                  <a:srgbClr val="1D1D1F"/>
                 </a:solidFill>
                 <a:latin typeface="Manrope SemiBold" pitchFamily="2" charset="0"/>
               </a:rPr>
@@ -10922,7 +10922,7 @@
             <a:r>
               <a:rPr lang="fr-FR" sz="1900">
                 <a:solidFill>
-                  <a:srgbClr val="F2F5F8"/>
+                  <a:srgbClr val="1D1D1F"/>
                 </a:solidFill>
                 <a:latin typeface="Manrope Medium" pitchFamily="2" charset="0"/>
               </a:rPr>
@@ -10967,7 +10967,7 @@
             <a:r>
               <a:rPr lang="fr-FR" sz="1350">
                 <a:solidFill>
-                  <a:srgbClr val="9CA9B6"/>
+                  <a:srgbClr val="5F6B76"/>
                 </a:solidFill>
                 <a:latin typeface="Manrope" pitchFamily="2" charset="0"/>
               </a:rPr>
@@ -10997,7 +10997,7 @@
             <a:avLst/>
           </a:prstGeom>
           <a:solidFill>
-            <a:srgbClr val="243040"/>
+            <a:srgbClr val="E2E8ED"/>
           </a:solidFill>
           <a:ln w="19050" cap="flat" cmpd="sng" algn="ctr">
             <a:noFill/>
@@ -11080,7 +11080,7 @@
             <a:r>
               <a:rPr lang="fr-FR" sz="1900">
                 <a:solidFill>
-                  <a:srgbClr val="F2F5F8"/>
+                  <a:srgbClr val="1D1D1F"/>
                 </a:solidFill>
                 <a:latin typeface="Manrope Medium" pitchFamily="2" charset="0"/>
               </a:rPr>
@@ -11125,7 +11125,7 @@
             <a:r>
               <a:rPr lang="fr-FR" sz="1350">
                 <a:solidFill>
-                  <a:srgbClr val="9CA9B6"/>
+                  <a:srgbClr val="5F6B76"/>
                 </a:solidFill>
                 <a:latin typeface="Manrope" pitchFamily="2" charset="0"/>
               </a:rPr>
@@ -11155,7 +11155,7 @@
             <a:avLst/>
           </a:prstGeom>
           <a:solidFill>
-            <a:srgbClr val="243040"/>
+            <a:srgbClr val="E2E8ED"/>
           </a:solidFill>
           <a:ln w="19050" cap="flat" cmpd="sng" algn="ctr">
             <a:noFill/>
@@ -11238,7 +11238,7 @@
             <a:r>
               <a:rPr lang="fr-FR" sz="1900">
                 <a:solidFill>
-                  <a:srgbClr val="F2F5F8"/>
+                  <a:srgbClr val="1D1D1F"/>
                 </a:solidFill>
                 <a:latin typeface="Manrope Medium" pitchFamily="2" charset="0"/>
               </a:rPr>
@@ -11283,7 +11283,7 @@
             <a:r>
               <a:rPr lang="fr-FR" sz="1350">
                 <a:solidFill>
-                  <a:srgbClr val="9CA9B6"/>
+                  <a:srgbClr val="5F6B76"/>
                 </a:solidFill>
                 <a:latin typeface="Manrope" pitchFamily="2" charset="0"/>
               </a:rPr>
@@ -11313,7 +11313,7 @@
             <a:avLst/>
           </a:prstGeom>
           <a:solidFill>
-            <a:srgbClr val="243040"/>
+            <a:srgbClr val="E2E8ED"/>
           </a:solidFill>
           <a:ln w="19050" cap="flat" cmpd="sng" algn="ctr">
             <a:noFill/>
@@ -11382,21 +11382,22 @@
               </a:ext>
             </a:extLst>
           </a:blip>
+          <a:srcRect l="634" t="746"/>
           <a:stretch>
             <a:fillRect/>
           </a:stretch>
         </p:blipFill>
         <p:spPr>
           <a:xfrm>
-            <a:off x="1456306" y="1854200"/>
-            <a:ext cx="4097788" cy="4241800"/>
+            <a:off x="1482290" y="1885846"/>
+            <a:ext cx="4071803" cy="4210153"/>
           </a:xfrm>
           <a:prstGeom prst="rect">
             <a:avLst/>
           </a:prstGeom>
           <a:ln w="9525">
             <a:solidFill>
-              <a:srgbClr val="D0D0D0"/>
+              <a:srgbClr val="E2E8ED"/>
             </a:solidFill>
           </a:ln>
         </p:spPr>
@@ -11881,7 +11882,7 @@
     <p:bg>
       <p:bgPr>
         <a:solidFill>
-          <a:srgbClr val="0B1016"/>
+          <a:srgbClr val="F7F9FB"/>
         </a:solidFill>
         <a:effectLst/>
       </p:bgPr>
@@ -11936,7 +11937,7 @@
             <a:r>
               <a:rPr lang="fr-FR" sz="1100" spc="260">
                 <a:solidFill>
-                  <a:srgbClr val="A9CCE3"/>
+                  <a:srgbClr val="24577A"/>
                 </a:solidFill>
                 <a:latin typeface="Manrope SemiBold" pitchFamily="2" charset="0"/>
               </a:rPr>
@@ -11976,7 +11977,7 @@
             <a:r>
               <a:rPr lang="fr-FR" sz="3600" spc="-50">
                 <a:solidFill>
-                  <a:srgbClr val="F2F5F8"/>
+                  <a:srgbClr val="1D1D1F"/>
                 </a:solidFill>
                 <a:latin typeface="Manrope SemiBold" pitchFamily="2" charset="0"/>
               </a:rPr>
@@ -11987,10 +11988,10 @@
                 <a:gradFill flip="none" rotWithShape="1">
                   <a:gsLst>
                     <a:gs pos="0">
-                      <a:srgbClr val="5A93BF"/>
+                      <a:srgbClr val="24577A"/>
                     </a:gs>
                     <a:gs pos="100000">
-                      <a:srgbClr val="A9CCE3"/>
+                      <a:srgbClr val="24577A"/>
                     </a:gs>
                   </a:gsLst>
                   <a:lin ang="0" scaled="1"/>
@@ -12003,7 +12004,7 @@
             <a:r>
               <a:rPr lang="fr-FR" sz="3600" spc="-50">
                 <a:solidFill>
-                  <a:srgbClr val="F2F5F8"/>
+                  <a:srgbClr val="1D1D1F"/>
                 </a:solidFill>
                 <a:latin typeface="Manrope SemiBold" pitchFamily="2" charset="0"/>
               </a:rPr>
@@ -12035,11 +12036,11 @@
             </a:avLst>
           </a:prstGeom>
           <a:solidFill>
-            <a:srgbClr val="121A23"/>
+            <a:srgbClr val="FFFFFF"/>
           </a:solidFill>
           <a:ln w="9525">
             <a:solidFill>
-              <a:srgbClr val="243040"/>
+              <a:srgbClr val="E2E8ED"/>
             </a:solidFill>
           </a:ln>
         </p:spPr>
@@ -12104,7 +12105,7 @@
             <a:r>
               <a:rPr lang="fr-FR" sz="1000" spc="220">
                 <a:solidFill>
-                  <a:srgbClr val="A9CCE3"/>
+                  <a:srgbClr val="24577A"/>
                 </a:solidFill>
                 <a:latin typeface="Manrope SemiBold" pitchFamily="2" charset="0"/>
               </a:rPr>
@@ -12149,7 +12150,7 @@
             <a:r>
               <a:rPr lang="fr-FR" sz="2100">
                 <a:solidFill>
-                  <a:srgbClr val="F2F5F8"/>
+                  <a:srgbClr val="1D1D1F"/>
                 </a:solidFill>
                 <a:latin typeface="Manrope SemiBold" pitchFamily="2" charset="0"/>
               </a:rPr>
@@ -12179,7 +12180,7 @@
             <a:avLst/>
           </a:prstGeom>
           <a:solidFill>
-            <a:srgbClr val="A9CCE3"/>
+            <a:srgbClr val="24577A"/>
           </a:solidFill>
           <a:ln w="19050" cap="flat" cmpd="sng" algn="ctr">
             <a:noFill/>
@@ -12262,7 +12263,7 @@
             <a:r>
               <a:rPr lang="fr-FR" sz="1250">
                 <a:solidFill>
-                  <a:srgbClr val="9CA9B6"/>
+                  <a:srgbClr val="5F6B76"/>
                 </a:solidFill>
                 <a:latin typeface="Manrope" pitchFamily="2" charset="0"/>
               </a:rPr>
@@ -12292,7 +12293,7 @@
             <a:avLst/>
           </a:prstGeom>
           <a:solidFill>
-            <a:srgbClr val="A9CCE3"/>
+            <a:srgbClr val="24577A"/>
           </a:solidFill>
           <a:ln w="19050" cap="flat" cmpd="sng" algn="ctr">
             <a:noFill/>
@@ -12375,7 +12376,7 @@
             <a:r>
               <a:rPr lang="fr-FR" sz="1250">
                 <a:solidFill>
-                  <a:srgbClr val="9CA9B6"/>
+                  <a:srgbClr val="5F6B76"/>
                 </a:solidFill>
                 <a:latin typeface="Manrope" pitchFamily="2" charset="0"/>
               </a:rPr>
@@ -12405,7 +12406,7 @@
             <a:avLst/>
           </a:prstGeom>
           <a:solidFill>
-            <a:srgbClr val="A9CCE3"/>
+            <a:srgbClr val="24577A"/>
           </a:solidFill>
           <a:ln w="19050" cap="flat" cmpd="sng" algn="ctr">
             <a:noFill/>
@@ -12488,7 +12489,7 @@
             <a:r>
               <a:rPr lang="fr-FR" sz="1250">
                 <a:solidFill>
-                  <a:srgbClr val="9CA9B6"/>
+                  <a:srgbClr val="5F6B76"/>
                 </a:solidFill>
                 <a:latin typeface="Manrope" pitchFamily="2" charset="0"/>
               </a:rPr>
@@ -12520,11 +12521,11 @@
             </a:avLst>
           </a:prstGeom>
           <a:solidFill>
-            <a:srgbClr val="121A23"/>
+            <a:srgbClr val="FFFFFF"/>
           </a:solidFill>
           <a:ln w="9525">
             <a:solidFill>
-              <a:srgbClr val="243040"/>
+              <a:srgbClr val="E2E8ED"/>
             </a:solidFill>
           </a:ln>
         </p:spPr>
@@ -12589,7 +12590,7 @@
             <a:r>
               <a:rPr lang="fr-FR" sz="1000" spc="220">
                 <a:solidFill>
-                  <a:srgbClr val="A9CCE3"/>
+                  <a:srgbClr val="24577A"/>
                 </a:solidFill>
                 <a:latin typeface="Manrope SemiBold" pitchFamily="2" charset="0"/>
               </a:rPr>
@@ -12634,7 +12635,7 @@
             <a:r>
               <a:rPr lang="fr-FR" sz="2100">
                 <a:solidFill>
-                  <a:srgbClr val="F2F5F8"/>
+                  <a:srgbClr val="1D1D1F"/>
                 </a:solidFill>
                 <a:latin typeface="Manrope SemiBold" pitchFamily="2" charset="0"/>
               </a:rPr>
@@ -12664,7 +12665,7 @@
             <a:avLst/>
           </a:prstGeom>
           <a:solidFill>
-            <a:srgbClr val="A9CCE3"/>
+            <a:srgbClr val="24577A"/>
           </a:solidFill>
           <a:ln w="19050" cap="flat" cmpd="sng" algn="ctr">
             <a:noFill/>
@@ -12747,7 +12748,7 @@
             <a:r>
               <a:rPr lang="fr-FR" sz="1250">
                 <a:solidFill>
-                  <a:srgbClr val="9CA9B6"/>
+                  <a:srgbClr val="5F6B76"/>
                 </a:solidFill>
                 <a:latin typeface="Manrope" pitchFamily="2" charset="0"/>
               </a:rPr>
@@ -12777,7 +12778,7 @@
             <a:avLst/>
           </a:prstGeom>
           <a:solidFill>
-            <a:srgbClr val="A9CCE3"/>
+            <a:srgbClr val="24577A"/>
           </a:solidFill>
           <a:ln w="19050" cap="flat" cmpd="sng" algn="ctr">
             <a:noFill/>
@@ -12860,7 +12861,7 @@
             <a:r>
               <a:rPr lang="fr-FR" sz="1250">
                 <a:solidFill>
-                  <a:srgbClr val="9CA9B6"/>
+                  <a:srgbClr val="5F6B76"/>
                 </a:solidFill>
                 <a:latin typeface="Manrope" pitchFamily="2" charset="0"/>
               </a:rPr>
@@ -12890,7 +12891,7 @@
             <a:avLst/>
           </a:prstGeom>
           <a:solidFill>
-            <a:srgbClr val="A9CCE3"/>
+            <a:srgbClr val="24577A"/>
           </a:solidFill>
           <a:ln w="19050" cap="flat" cmpd="sng" algn="ctr">
             <a:noFill/>
@@ -12973,7 +12974,7 @@
             <a:r>
               <a:rPr lang="fr-FR" sz="1250">
                 <a:solidFill>
-                  <a:srgbClr val="9CA9B6"/>
+                  <a:srgbClr val="5F6B76"/>
                 </a:solidFill>
                 <a:latin typeface="Manrope" pitchFamily="2" charset="0"/>
               </a:rPr>
@@ -13005,11 +13006,11 @@
             </a:avLst>
           </a:prstGeom>
           <a:solidFill>
-            <a:srgbClr val="121A23"/>
+            <a:srgbClr val="FFFFFF"/>
           </a:solidFill>
           <a:ln w="9525">
             <a:solidFill>
-              <a:srgbClr val="243040"/>
+              <a:srgbClr val="E2E8ED"/>
             </a:solidFill>
           </a:ln>
         </p:spPr>
@@ -13074,7 +13075,7 @@
             <a:r>
               <a:rPr lang="fr-FR" sz="1000" spc="220">
                 <a:solidFill>
-                  <a:srgbClr val="A9CCE3"/>
+                  <a:srgbClr val="24577A"/>
                 </a:solidFill>
                 <a:latin typeface="Manrope SemiBold" pitchFamily="2" charset="0"/>
               </a:rPr>
@@ -13119,7 +13120,7 @@
             <a:r>
               <a:rPr lang="fr-FR" sz="2100">
                 <a:solidFill>
-                  <a:srgbClr val="F2F5F8"/>
+                  <a:srgbClr val="1D1D1F"/>
                 </a:solidFill>
                 <a:latin typeface="Manrope SemiBold" pitchFamily="2" charset="0"/>
               </a:rPr>
@@ -13149,7 +13150,7 @@
             <a:avLst/>
           </a:prstGeom>
           <a:solidFill>
-            <a:srgbClr val="A9CCE3"/>
+            <a:srgbClr val="24577A"/>
           </a:solidFill>
           <a:ln w="19050" cap="flat" cmpd="sng" algn="ctr">
             <a:noFill/>
@@ -13232,7 +13233,7 @@
             <a:r>
               <a:rPr lang="fr-FR" sz="1250">
                 <a:solidFill>
-                  <a:srgbClr val="9CA9B6"/>
+                  <a:srgbClr val="5F6B76"/>
                 </a:solidFill>
                 <a:latin typeface="Manrope" pitchFamily="2" charset="0"/>
               </a:rPr>
@@ -13262,7 +13263,7 @@
             <a:avLst/>
           </a:prstGeom>
           <a:solidFill>
-            <a:srgbClr val="A9CCE3"/>
+            <a:srgbClr val="24577A"/>
           </a:solidFill>
           <a:ln w="19050" cap="flat" cmpd="sng" algn="ctr">
             <a:noFill/>
@@ -13345,7 +13346,7 @@
             <a:r>
               <a:rPr lang="fr-FR" sz="1250">
                 <a:solidFill>
-                  <a:srgbClr val="9CA9B6"/>
+                  <a:srgbClr val="5F6B76"/>
                 </a:solidFill>
                 <a:latin typeface="Manrope" pitchFamily="2" charset="0"/>
               </a:rPr>
@@ -13375,7 +13376,7 @@
             <a:avLst/>
           </a:prstGeom>
           <a:solidFill>
-            <a:srgbClr val="A9CCE3"/>
+            <a:srgbClr val="24577A"/>
           </a:solidFill>
           <a:ln w="19050" cap="flat" cmpd="sng" algn="ctr">
             <a:noFill/>
@@ -13458,7 +13459,7 @@
             <a:r>
               <a:rPr lang="fr-FR" sz="1250">
                 <a:solidFill>
-                  <a:srgbClr val="9CA9B6"/>
+                  <a:srgbClr val="5F6B76"/>
                 </a:solidFill>
                 <a:latin typeface="Manrope" pitchFamily="2" charset="0"/>
               </a:rPr>
@@ -14595,7 +14596,7 @@
     <p:bg>
       <p:bgPr>
         <a:solidFill>
-          <a:srgbClr val="0B1016"/>
+          <a:srgbClr val="F7F9FB"/>
         </a:solidFill>
         <a:effectLst/>
       </p:bgPr>
@@ -14650,7 +14651,7 @@
             <a:r>
               <a:rPr lang="fr-FR" sz="1100" spc="260">
                 <a:solidFill>
-                  <a:srgbClr val="A9CCE3"/>
+                  <a:srgbClr val="24577A"/>
                 </a:solidFill>
                 <a:latin typeface="Manrope SemiBold" pitchFamily="2" charset="0"/>
               </a:rPr>
@@ -14690,7 +14691,7 @@
             <a:r>
               <a:rPr lang="fr-FR" sz="3600" spc="-50">
                 <a:solidFill>
-                  <a:srgbClr val="F2F5F8"/>
+                  <a:srgbClr val="1D1D1F"/>
                 </a:solidFill>
                 <a:latin typeface="Manrope SemiBold" pitchFamily="2" charset="0"/>
               </a:rPr>
@@ -14701,10 +14702,10 @@
                 <a:gradFill flip="none" rotWithShape="1">
                   <a:gsLst>
                     <a:gs pos="0">
-                      <a:srgbClr val="5A93BF"/>
+                      <a:srgbClr val="24577A"/>
                     </a:gs>
                     <a:gs pos="100000">
-                      <a:srgbClr val="A9CCE3"/>
+                      <a:srgbClr val="24577A"/>
                     </a:gs>
                   </a:gsLst>
                   <a:lin ang="0" scaled="1"/>
@@ -14717,7 +14718,7 @@
             <a:r>
               <a:rPr lang="fr-FR" sz="3600" spc="-50">
                 <a:solidFill>
-                  <a:srgbClr val="F2F5F8"/>
+                  <a:srgbClr val="1D1D1F"/>
                 </a:solidFill>
                 <a:latin typeface="Manrope SemiBold" pitchFamily="2" charset="0"/>
               </a:rPr>
@@ -14757,7 +14758,7 @@
             <a:r>
               <a:rPr lang="fr-FR" sz="7600" spc="-200">
                 <a:solidFill>
-                  <a:srgbClr val="F2F5F8"/>
+                  <a:srgbClr val="1D1D1F"/>
                 </a:solidFill>
                 <a:latin typeface="Manrope SemiBold" pitchFamily="2" charset="0"/>
               </a:rPr>
@@ -14802,7 +14803,7 @@
             <a:r>
               <a:rPr lang="fr-FR">
                 <a:solidFill>
-                  <a:srgbClr val="A9CCE3"/>
+                  <a:srgbClr val="24577A"/>
                 </a:solidFill>
                 <a:latin typeface="Manrope Medium" pitchFamily="2" charset="0"/>
               </a:rPr>
@@ -14847,7 +14848,7 @@
             <a:r>
               <a:rPr lang="en-US" sz="1250">
                 <a:solidFill>
-                  <a:srgbClr val="9CA9B6"/>
+                  <a:srgbClr val="5F6B76"/>
                 </a:solidFill>
                 <a:latin typeface="Manrope" pitchFamily="2" charset="0"/>
               </a:rPr>
@@ -14855,7 +14856,7 @@
             </a:r>
             <a:endParaRPr lang="fr-FR" sz="1250">
               <a:solidFill>
-                <a:srgbClr val="9CA9B6"/>
+                <a:srgbClr val="5F6B76"/>
               </a:solidFill>
               <a:latin typeface="Manrope" pitchFamily="2" charset="0"/>
             </a:endParaRPr>
@@ -14893,7 +14894,7 @@
             <a:r>
               <a:rPr lang="fr-FR" sz="7600" spc="-200">
                 <a:solidFill>
-                  <a:srgbClr val="F2F5F8"/>
+                  <a:srgbClr val="1D1D1F"/>
                 </a:solidFill>
                 <a:latin typeface="Manrope SemiBold" pitchFamily="2" charset="0"/>
               </a:rPr>
@@ -14938,7 +14939,7 @@
             <a:r>
               <a:rPr lang="fr-FR">
                 <a:solidFill>
-                  <a:srgbClr val="A9CCE3"/>
+                  <a:srgbClr val="24577A"/>
                 </a:solidFill>
                 <a:latin typeface="Manrope Medium" pitchFamily="2" charset="0"/>
               </a:rPr>
@@ -14983,7 +14984,7 @@
             <a:r>
               <a:rPr lang="fr-FR" sz="1250">
                 <a:solidFill>
-                  <a:srgbClr val="9CA9B6"/>
+                  <a:srgbClr val="5F6B76"/>
                 </a:solidFill>
                 <a:latin typeface="Manrope" pitchFamily="2" charset="0"/>
               </a:rPr>
@@ -15023,7 +15024,7 @@
             <a:r>
               <a:rPr lang="fr-FR" sz="7600" spc="-200">
                 <a:solidFill>
-                  <a:srgbClr val="F2F5F8"/>
+                  <a:srgbClr val="1D1D1F"/>
                 </a:solidFill>
                 <a:latin typeface="Manrope SemiBold" pitchFamily="2" charset="0"/>
               </a:rPr>
@@ -15068,7 +15069,7 @@
             <a:r>
               <a:rPr lang="fr-FR">
                 <a:solidFill>
-                  <a:srgbClr val="A9CCE3"/>
+                  <a:srgbClr val="24577A"/>
                 </a:solidFill>
                 <a:latin typeface="Manrope Medium" pitchFamily="2" charset="0"/>
               </a:rPr>
@@ -15113,7 +15114,7 @@
             <a:r>
               <a:rPr lang="fr-FR" sz="1250">
                 <a:solidFill>
-                  <a:srgbClr val="9CA9B6"/>
+                  <a:srgbClr val="5F6B76"/>
                 </a:solidFill>
                 <a:latin typeface="Manrope" pitchFamily="2" charset="0"/>
               </a:rPr>
@@ -15153,7 +15154,7 @@
             <a:r>
               <a:rPr lang="fr-FR" sz="7600" spc="-200">
                 <a:solidFill>
-                  <a:srgbClr val="F2F5F8"/>
+                  <a:srgbClr val="1D1D1F"/>
                 </a:solidFill>
                 <a:latin typeface="Manrope SemiBold" pitchFamily="2" charset="0"/>
               </a:rPr>
@@ -15198,7 +15199,7 @@
             <a:r>
               <a:rPr lang="fr-FR">
                 <a:solidFill>
-                  <a:srgbClr val="A9CCE3"/>
+                  <a:srgbClr val="24577A"/>
                 </a:solidFill>
                 <a:latin typeface="Manrope Medium" pitchFamily="2" charset="0"/>
               </a:rPr>
@@ -15243,7 +15244,7 @@
             <a:r>
               <a:rPr lang="fr-FR" sz="1250">
                 <a:solidFill>
-                  <a:srgbClr val="9CA9B6"/>
+                  <a:srgbClr val="5F6B76"/>
                 </a:solidFill>
                 <a:latin typeface="Manrope" pitchFamily="2" charset="0"/>
               </a:rPr>
@@ -15273,7 +15274,7 @@
             <a:avLst/>
           </a:prstGeom>
           <a:solidFill>
-            <a:srgbClr val="243040"/>
+            <a:srgbClr val="E2E8ED"/>
           </a:solidFill>
           <a:ln w="19050" cap="flat" cmpd="sng" algn="ctr">
             <a:noFill/>
@@ -15356,7 +15357,7 @@
             <a:r>
               <a:rPr lang="fr-FR" sz="1400">
                 <a:solidFill>
-                  <a:srgbClr val="9CA9B6"/>
+                  <a:srgbClr val="5F6B76"/>
                 </a:solidFill>
                 <a:latin typeface="Manrope" pitchFamily="2" charset="0"/>
               </a:rPr>
@@ -16025,7 +16026,7 @@
     <p:bg>
       <p:bgPr>
         <a:solidFill>
-          <a:srgbClr val="0B1016"/>
+          <a:srgbClr val="F7F9FB"/>
         </a:solidFill>
         <a:effectLst/>
       </p:bgPr>
@@ -16080,7 +16081,7 @@
             <a:r>
               <a:rPr lang="fr-FR" sz="1100" spc="260">
                 <a:solidFill>
-                  <a:srgbClr val="A9CCE3"/>
+                  <a:srgbClr val="24577A"/>
                 </a:solidFill>
                 <a:latin typeface="Manrope SemiBold" pitchFamily="2" charset="0"/>
               </a:rPr>
@@ -16120,7 +16121,7 @@
             <a:r>
               <a:rPr lang="fr-FR" sz="3600" spc="-50">
                 <a:solidFill>
-                  <a:srgbClr val="F2F5F8"/>
+                  <a:srgbClr val="1D1D1F"/>
                 </a:solidFill>
                 <a:latin typeface="Manrope SemiBold" pitchFamily="2" charset="0"/>
               </a:rPr>
@@ -16131,10 +16132,10 @@
                 <a:gradFill flip="none" rotWithShape="1">
                   <a:gsLst>
                     <a:gs pos="0">
-                      <a:srgbClr val="5A93BF"/>
+                      <a:srgbClr val="24577A"/>
                     </a:gs>
                     <a:gs pos="100000">
-                      <a:srgbClr val="A9CCE3"/>
+                      <a:srgbClr val="24577A"/>
                     </a:gs>
                   </a:gsLst>
                   <a:lin ang="0" scaled="1"/>
@@ -16147,7 +16148,7 @@
             <a:r>
               <a:rPr lang="fr-FR" sz="3600" spc="-50">
                 <a:solidFill>
-                  <a:srgbClr val="F2F5F8"/>
+                  <a:srgbClr val="1D1D1F"/>
                 </a:solidFill>
                 <a:latin typeface="Manrope SemiBold" pitchFamily="2" charset="0"/>
               </a:rPr>
@@ -16179,11 +16180,11 @@
             </a:avLst>
           </a:prstGeom>
           <a:solidFill>
-            <a:srgbClr val="121A23"/>
+            <a:srgbClr val="FFFFFF"/>
           </a:solidFill>
           <a:ln w="9525">
             <a:solidFill>
-              <a:srgbClr val="243040"/>
+              <a:srgbClr val="E2E8ED"/>
             </a:solidFill>
           </a:ln>
         </p:spPr>
@@ -16248,7 +16249,7 @@
             <a:r>
               <a:rPr lang="fr-FR" sz="1000" spc="220">
                 <a:solidFill>
-                  <a:srgbClr val="A9CCE3"/>
+                  <a:srgbClr val="24577A"/>
                 </a:solidFill>
                 <a:latin typeface="Manrope SemiBold" pitchFamily="2" charset="0"/>
               </a:rPr>
@@ -16293,7 +16294,7 @@
             <a:r>
               <a:rPr lang="fr-FR" sz="2400">
                 <a:solidFill>
-                  <a:srgbClr val="F2F5F8"/>
+                  <a:srgbClr val="1D1D1F"/>
                 </a:solidFill>
                 <a:latin typeface="Manrope SemiBold" pitchFamily="2" charset="0"/>
               </a:rPr>
@@ -16338,7 +16339,7 @@
             <a:r>
               <a:rPr lang="fr-FR" sz="1250">
                 <a:solidFill>
-                  <a:srgbClr val="9CA9B6"/>
+                  <a:srgbClr val="5F6B76"/>
                 </a:solidFill>
                 <a:latin typeface="Manrope" pitchFamily="2" charset="0"/>
               </a:rPr>
@@ -16369,7 +16370,7 @@
           </a:prstGeom>
           <a:ln w="15875">
             <a:solidFill>
-              <a:srgbClr val="9CA9B6"/>
+              <a:srgbClr val="5F6B76"/>
             </a:solidFill>
             <a:tailEnd type="triangle" w="med" len="med"/>
           </a:ln>
@@ -16412,11 +16413,11 @@
             </a:avLst>
           </a:prstGeom>
           <a:solidFill>
-            <a:srgbClr val="121A23"/>
+            <a:srgbClr val="FFFFFF"/>
           </a:solidFill>
           <a:ln w="9525">
             <a:solidFill>
-              <a:srgbClr val="243040"/>
+              <a:srgbClr val="E2E8ED"/>
             </a:solidFill>
           </a:ln>
         </p:spPr>
@@ -16481,7 +16482,7 @@
             <a:r>
               <a:rPr lang="fr-FR" sz="1000" spc="220">
                 <a:solidFill>
-                  <a:srgbClr val="A9CCE3"/>
+                  <a:srgbClr val="24577A"/>
                 </a:solidFill>
                 <a:latin typeface="Manrope SemiBold" pitchFamily="2" charset="0"/>
               </a:rPr>
@@ -16526,7 +16527,7 @@
             <a:r>
               <a:rPr lang="fr-FR" sz="2400">
                 <a:solidFill>
-                  <a:srgbClr val="F2F5F8"/>
+                  <a:srgbClr val="1D1D1F"/>
                 </a:solidFill>
                 <a:latin typeface="Manrope SemiBold" pitchFamily="2" charset="0"/>
               </a:rPr>
@@ -16571,7 +16572,7 @@
             <a:r>
               <a:rPr lang="fr-FR" sz="1250">
                 <a:solidFill>
-                  <a:srgbClr val="9CA9B6"/>
+                  <a:srgbClr val="5F6B76"/>
                 </a:solidFill>
                 <a:latin typeface="Manrope" pitchFamily="2" charset="0"/>
               </a:rPr>
@@ -16602,7 +16603,7 @@
           </a:prstGeom>
           <a:ln w="15875">
             <a:solidFill>
-              <a:srgbClr val="9CA9B6"/>
+              <a:srgbClr val="5F6B76"/>
             </a:solidFill>
             <a:tailEnd type="triangle" w="med" len="med"/>
           </a:ln>
@@ -16645,11 +16646,11 @@
             </a:avLst>
           </a:prstGeom>
           <a:solidFill>
-            <a:srgbClr val="121A23"/>
+            <a:srgbClr val="FFFFFF"/>
           </a:solidFill>
           <a:ln w="9525">
             <a:solidFill>
-              <a:srgbClr val="243040"/>
+              <a:srgbClr val="E2E8ED"/>
             </a:solidFill>
           </a:ln>
         </p:spPr>
@@ -16714,7 +16715,7 @@
             <a:r>
               <a:rPr lang="fr-FR" sz="1000" spc="220">
                 <a:solidFill>
-                  <a:srgbClr val="A9CCE3"/>
+                  <a:srgbClr val="24577A"/>
                 </a:solidFill>
                 <a:latin typeface="Manrope SemiBold" pitchFamily="2" charset="0"/>
               </a:rPr>
@@ -16759,7 +16760,7 @@
             <a:r>
               <a:rPr lang="fr-FR" sz="2400">
                 <a:solidFill>
-                  <a:srgbClr val="F2F5F8"/>
+                  <a:srgbClr val="1D1D1F"/>
                 </a:solidFill>
                 <a:latin typeface="Manrope SemiBold" pitchFamily="2" charset="0"/>
               </a:rPr>
@@ -16804,7 +16805,7 @@
             <a:r>
               <a:rPr lang="fr-FR" sz="1250">
                 <a:solidFill>
-                  <a:srgbClr val="9CA9B6"/>
+                  <a:srgbClr val="5F6B76"/>
                 </a:solidFill>
                 <a:latin typeface="Manrope" pitchFamily="2" charset="0"/>
               </a:rPr>
@@ -16836,7 +16837,7 @@
             </a:avLst>
           </a:prstGeom>
           <a:solidFill>
-            <a:srgbClr val="182330"/>
+            <a:srgbClr val="F0F5F8"/>
           </a:solidFill>
           <a:ln w="19050" cap="flat" cmpd="sng" algn="ctr">
             <a:noFill/>
@@ -16904,7 +16905,7 @@
             <a:avLst/>
           </a:prstGeom>
           <a:solidFill>
-            <a:srgbClr val="A9CCE3"/>
+            <a:srgbClr val="24577A"/>
           </a:solidFill>
           <a:ln w="19050" cap="flat" cmpd="sng" algn="ctr">
             <a:noFill/>
@@ -16987,7 +16988,7 @@
             <a:r>
               <a:rPr lang="fr-FR">
                 <a:solidFill>
-                  <a:srgbClr val="F2F5F8"/>
+                  <a:srgbClr val="1D1D1F"/>
                 </a:solidFill>
                 <a:latin typeface="Manrope Medium" pitchFamily="2" charset="0"/>
               </a:rPr>
@@ -17032,7 +17033,7 @@
             <a:r>
               <a:rPr lang="fr-FR" sz="1350">
                 <a:solidFill>
-                  <a:srgbClr val="9CA9B6"/>
+                  <a:srgbClr val="5F6B76"/>
                 </a:solidFill>
                 <a:latin typeface="Manrope" pitchFamily="2" charset="0"/>
               </a:rPr>
@@ -17843,7 +17844,7 @@
     <p:bg>
       <p:bgPr>
         <a:solidFill>
-          <a:srgbClr val="0B1016"/>
+          <a:srgbClr val="F7F9FB"/>
         </a:solidFill>
         <a:effectLst/>
       </p:bgPr>
@@ -17898,7 +17899,7 @@
             <a:r>
               <a:rPr lang="fr-FR" sz="1100" spc="260">
                 <a:solidFill>
-                  <a:srgbClr val="A9CCE3"/>
+                  <a:srgbClr val="24577A"/>
                 </a:solidFill>
                 <a:latin typeface="Manrope SemiBold" pitchFamily="2" charset="0"/>
               </a:rPr>
@@ -17938,7 +17939,7 @@
             <a:r>
               <a:rPr lang="fr-FR" sz="3600" spc="-50">
                 <a:solidFill>
-                  <a:srgbClr val="F2F5F8"/>
+                  <a:srgbClr val="1D1D1F"/>
                 </a:solidFill>
                 <a:latin typeface="Manrope SemiBold" pitchFamily="2" charset="0"/>
               </a:rPr>
@@ -17949,10 +17950,10 @@
                 <a:gradFill flip="none" rotWithShape="1">
                   <a:gsLst>
                     <a:gs pos="0">
-                      <a:srgbClr val="5A93BF"/>
+                      <a:srgbClr val="24577A"/>
                     </a:gs>
                     <a:gs pos="100000">
-                      <a:srgbClr val="A9CCE3"/>
+                      <a:srgbClr val="24577A"/>
                     </a:gs>
                   </a:gsLst>
                   <a:lin ang="0" scaled="1"/>
@@ -17965,7 +17966,7 @@
             <a:r>
               <a:rPr lang="fr-FR" sz="3600" spc="-50">
                 <a:solidFill>
-                  <a:srgbClr val="F2F5F8"/>
+                  <a:srgbClr val="1D1D1F"/>
                 </a:solidFill>
                 <a:latin typeface="Manrope SemiBold" pitchFamily="2" charset="0"/>
               </a:rPr>
@@ -17997,11 +17998,11 @@
             </a:avLst>
           </a:prstGeom>
           <a:solidFill>
-            <a:srgbClr val="121A23"/>
+            <a:srgbClr val="FFFFFF"/>
           </a:solidFill>
           <a:ln w="9525">
             <a:solidFill>
-              <a:srgbClr val="243040"/>
+              <a:srgbClr val="E2E8ED"/>
             </a:solidFill>
           </a:ln>
         </p:spPr>
@@ -18066,7 +18067,7 @@
             <a:r>
               <a:rPr lang="fr-FR" sz="1200">
                 <a:solidFill>
-                  <a:srgbClr val="A9CCE3"/>
+                  <a:srgbClr val="24577A"/>
                 </a:solidFill>
                 <a:latin typeface="Manrope SemiBold" pitchFamily="2" charset="0"/>
               </a:rPr>
@@ -18111,7 +18112,7 @@
             <a:r>
               <a:rPr lang="fr-FR" sz="1550">
                 <a:solidFill>
-                  <a:srgbClr val="F2F5F8"/>
+                  <a:srgbClr val="1D1D1F"/>
                 </a:solidFill>
                 <a:latin typeface="Manrope Medium" pitchFamily="2" charset="0"/>
               </a:rPr>
@@ -18156,7 +18157,7 @@
             <a:r>
               <a:rPr lang="fr-FR" sz="1150">
                 <a:solidFill>
-                  <a:srgbClr val="9CA9B6"/>
+                  <a:srgbClr val="5F6B76"/>
                 </a:solidFill>
                 <a:latin typeface="Manrope" pitchFamily="2" charset="0"/>
               </a:rPr>
@@ -18187,7 +18188,7 @@
           </a:prstGeom>
           <a:ln w="15875">
             <a:solidFill>
-              <a:srgbClr val="9CA9B6"/>
+              <a:srgbClr val="5F6B76"/>
             </a:solidFill>
             <a:tailEnd type="triangle" w="med" len="med"/>
           </a:ln>
@@ -18230,11 +18231,11 @@
             </a:avLst>
           </a:prstGeom>
           <a:solidFill>
-            <a:srgbClr val="121A23"/>
+            <a:srgbClr val="FFFFFF"/>
           </a:solidFill>
           <a:ln w="9525">
             <a:solidFill>
-              <a:srgbClr val="243040"/>
+              <a:srgbClr val="E2E8ED"/>
             </a:solidFill>
           </a:ln>
         </p:spPr>
@@ -18299,7 +18300,7 @@
             <a:r>
               <a:rPr lang="fr-FR" sz="1200">
                 <a:solidFill>
-                  <a:srgbClr val="A9CCE3"/>
+                  <a:srgbClr val="24577A"/>
                 </a:solidFill>
                 <a:latin typeface="Manrope SemiBold" pitchFamily="2" charset="0"/>
               </a:rPr>
@@ -18344,7 +18345,7 @@
             <a:r>
               <a:rPr lang="fr-FR" sz="1550">
                 <a:solidFill>
-                  <a:srgbClr val="F2F5F8"/>
+                  <a:srgbClr val="1D1D1F"/>
                 </a:solidFill>
                 <a:latin typeface="Manrope Medium" pitchFamily="2" charset="0"/>
               </a:rPr>
@@ -18389,7 +18390,7 @@
             <a:r>
               <a:rPr lang="fr-FR" sz="1150">
                 <a:solidFill>
-                  <a:srgbClr val="9CA9B6"/>
+                  <a:srgbClr val="5F6B76"/>
                 </a:solidFill>
                 <a:latin typeface="Manrope" pitchFamily="2" charset="0"/>
               </a:rPr>
@@ -18420,7 +18421,7 @@
           </a:prstGeom>
           <a:ln w="15875">
             <a:solidFill>
-              <a:srgbClr val="9CA9B6"/>
+              <a:srgbClr val="5F6B76"/>
             </a:solidFill>
             <a:tailEnd type="triangle" w="med" len="med"/>
           </a:ln>
@@ -18463,11 +18464,11 @@
             </a:avLst>
           </a:prstGeom>
           <a:solidFill>
-            <a:srgbClr val="121A23"/>
+            <a:srgbClr val="FFFFFF"/>
           </a:solidFill>
           <a:ln w="9525">
             <a:solidFill>
-              <a:srgbClr val="243040"/>
+              <a:srgbClr val="E2E8ED"/>
             </a:solidFill>
           </a:ln>
         </p:spPr>
@@ -18532,7 +18533,7 @@
             <a:r>
               <a:rPr lang="fr-FR" sz="1200">
                 <a:solidFill>
-                  <a:srgbClr val="A9CCE3"/>
+                  <a:srgbClr val="24577A"/>
                 </a:solidFill>
                 <a:latin typeface="Manrope SemiBold" pitchFamily="2" charset="0"/>
               </a:rPr>
@@ -18577,7 +18578,7 @@
             <a:r>
               <a:rPr lang="fr-FR" sz="1550">
                 <a:solidFill>
-                  <a:srgbClr val="F2F5F8"/>
+                  <a:srgbClr val="1D1D1F"/>
                 </a:solidFill>
                 <a:latin typeface="Manrope Medium" pitchFamily="2" charset="0"/>
               </a:rPr>
@@ -18622,7 +18623,7 @@
             <a:r>
               <a:rPr lang="fr-FR" sz="1150">
                 <a:solidFill>
-                  <a:srgbClr val="9CA9B6"/>
+                  <a:srgbClr val="5F6B76"/>
                 </a:solidFill>
                 <a:latin typeface="Manrope" pitchFamily="2" charset="0"/>
               </a:rPr>
@@ -18653,7 +18654,7 @@
           </a:prstGeom>
           <a:ln w="15875">
             <a:solidFill>
-              <a:srgbClr val="9CA9B6"/>
+              <a:srgbClr val="5F6B76"/>
             </a:solidFill>
             <a:tailEnd type="triangle" w="med" len="med"/>
           </a:ln>
@@ -18696,11 +18697,11 @@
             </a:avLst>
           </a:prstGeom>
           <a:solidFill>
-            <a:srgbClr val="121A23"/>
+            <a:srgbClr val="FFFFFF"/>
           </a:solidFill>
           <a:ln w="9525">
             <a:solidFill>
-              <a:srgbClr val="243040"/>
+              <a:srgbClr val="E2E8ED"/>
             </a:solidFill>
           </a:ln>
         </p:spPr>
@@ -18765,7 +18766,7 @@
             <a:r>
               <a:rPr lang="fr-FR" sz="1200">
                 <a:solidFill>
-                  <a:srgbClr val="A9CCE3"/>
+                  <a:srgbClr val="24577A"/>
                 </a:solidFill>
                 <a:latin typeface="Manrope SemiBold" pitchFamily="2" charset="0"/>
               </a:rPr>
@@ -18810,7 +18811,7 @@
             <a:r>
               <a:rPr lang="fr-FR" sz="1550">
                 <a:solidFill>
-                  <a:srgbClr val="F2F5F8"/>
+                  <a:srgbClr val="1D1D1F"/>
                 </a:solidFill>
                 <a:latin typeface="Manrope Medium" pitchFamily="2" charset="0"/>
               </a:rPr>
@@ -18855,7 +18856,7 @@
             <a:r>
               <a:rPr lang="fr-FR" sz="1150">
                 <a:solidFill>
-                  <a:srgbClr val="9CA9B6"/>
+                  <a:srgbClr val="5F6B76"/>
                 </a:solidFill>
                 <a:latin typeface="Manrope" pitchFamily="2" charset="0"/>
               </a:rPr>
@@ -18885,7 +18886,7 @@
             <a:avLst/>
           </a:prstGeom>
           <a:solidFill>
-            <a:srgbClr val="A9CCE3"/>
+            <a:srgbClr val="24577A"/>
           </a:solidFill>
           <a:ln w="19050" cap="flat" cmpd="sng" algn="ctr">
             <a:noFill/>
@@ -18968,7 +18969,7 @@
             <a:r>
               <a:rPr lang="fr-FR" sz="1500">
                 <a:solidFill>
-                  <a:srgbClr val="F2F5F8"/>
+                  <a:srgbClr val="1D1D1F"/>
                 </a:solidFill>
                 <a:latin typeface="Manrope Medium" pitchFamily="2" charset="0"/>
               </a:rPr>
@@ -19013,7 +19014,7 @@
             <a:r>
               <a:rPr lang="fr-FR" sz="1200">
                 <a:solidFill>
-                  <a:srgbClr val="9CA9B6"/>
+                  <a:srgbClr val="5F6B76"/>
                 </a:solidFill>
                 <a:latin typeface="Manrope" pitchFamily="2" charset="0"/>
               </a:rPr>
@@ -19043,7 +19044,7 @@
             <a:avLst/>
           </a:prstGeom>
           <a:solidFill>
-            <a:srgbClr val="A9CCE3"/>
+            <a:srgbClr val="24577A"/>
           </a:solidFill>
           <a:ln w="19050" cap="flat" cmpd="sng" algn="ctr">
             <a:noFill/>
@@ -19126,7 +19127,7 @@
             <a:r>
               <a:rPr lang="fr-FR" sz="1500">
                 <a:solidFill>
-                  <a:srgbClr val="F2F5F8"/>
+                  <a:srgbClr val="1D1D1F"/>
                 </a:solidFill>
                 <a:latin typeface="Manrope Medium" pitchFamily="2" charset="0"/>
               </a:rPr>
@@ -19171,7 +19172,7 @@
             <a:r>
               <a:rPr lang="fr-FR" sz="1200">
                 <a:solidFill>
-                  <a:srgbClr val="9CA9B6"/>
+                  <a:srgbClr val="5F6B76"/>
                 </a:solidFill>
                 <a:latin typeface="Manrope" pitchFamily="2" charset="0"/>
               </a:rPr>
@@ -19201,7 +19202,7 @@
             <a:avLst/>
           </a:prstGeom>
           <a:solidFill>
-            <a:srgbClr val="A9CCE3"/>
+            <a:srgbClr val="24577A"/>
           </a:solidFill>
           <a:ln w="19050" cap="flat" cmpd="sng" algn="ctr">
             <a:noFill/>
@@ -19284,7 +19285,7 @@
             <a:r>
               <a:rPr lang="fr-FR" sz="1500">
                 <a:solidFill>
-                  <a:srgbClr val="F2F5F8"/>
+                  <a:srgbClr val="1D1D1F"/>
                 </a:solidFill>
                 <a:latin typeface="Manrope Medium" pitchFamily="2" charset="0"/>
               </a:rPr>
@@ -19329,7 +19330,7 @@
             <a:r>
               <a:rPr lang="fr-FR" sz="1200">
                 <a:solidFill>
-                  <a:srgbClr val="9CA9B6"/>
+                  <a:srgbClr val="5F6B76"/>
                 </a:solidFill>
                 <a:latin typeface="Manrope" pitchFamily="2" charset="0"/>
               </a:rPr>
@@ -19359,7 +19360,7 @@
             <a:avLst/>
           </a:prstGeom>
           <a:solidFill>
-            <a:srgbClr val="A9CCE3"/>
+            <a:srgbClr val="24577A"/>
           </a:solidFill>
           <a:ln w="19050" cap="flat" cmpd="sng" algn="ctr">
             <a:noFill/>
@@ -19442,7 +19443,7 @@
             <a:r>
               <a:rPr lang="fr-FR" sz="1500">
                 <a:solidFill>
-                  <a:srgbClr val="F2F5F8"/>
+                  <a:srgbClr val="1D1D1F"/>
                 </a:solidFill>
                 <a:latin typeface="Manrope Medium" pitchFamily="2" charset="0"/>
               </a:rPr>
@@ -19487,7 +19488,7 @@
             <a:r>
               <a:rPr lang="fr-FR" sz="1200">
                 <a:solidFill>
-                  <a:srgbClr val="9CA9B6"/>
+                  <a:srgbClr val="5F6B76"/>
                 </a:solidFill>
                 <a:latin typeface="Manrope" pitchFamily="2" charset="0"/>
               </a:rPr>
@@ -20765,7 +20766,7 @@
     <p:bg>
       <p:bgPr>
         <a:solidFill>
-          <a:srgbClr val="0B1016"/>
+          <a:srgbClr val="F7F9FB"/>
         </a:solidFill>
         <a:effectLst/>
       </p:bgPr>
@@ -20820,7 +20821,7 @@
             <a:r>
               <a:rPr lang="fr-FR" sz="1100" spc="260">
                 <a:solidFill>
-                  <a:srgbClr val="A9CCE3"/>
+                  <a:srgbClr val="24577A"/>
                 </a:solidFill>
                 <a:latin typeface="Manrope SemiBold" pitchFamily="2" charset="0"/>
               </a:rPr>
@@ -20860,7 +20861,7 @@
             <a:r>
               <a:rPr lang="fr-FR" sz="3200" spc="-50" dirty="0">
                 <a:solidFill>
-                  <a:srgbClr val="F2F5F8"/>
+                  <a:srgbClr val="1D1D1F"/>
                 </a:solidFill>
                 <a:latin typeface="Manrope SemiBold" pitchFamily="2" charset="0"/>
               </a:rPr>
@@ -20871,10 +20872,10 @@
                 <a:gradFill flip="none" rotWithShape="1">
                   <a:gsLst>
                     <a:gs pos="0">
-                      <a:srgbClr val="5A93BF"/>
+                      <a:srgbClr val="24577A"/>
                     </a:gs>
                     <a:gs pos="100000">
-                      <a:srgbClr val="A9CCE3"/>
+                      <a:srgbClr val="24577A"/>
                     </a:gs>
                   </a:gsLst>
                   <a:lin ang="0" scaled="1"/>
@@ -20887,7 +20888,7 @@
             <a:r>
               <a:rPr lang="fr-FR" sz="3200" spc="-50" dirty="0">
                 <a:solidFill>
-                  <a:srgbClr val="F2F5F8"/>
+                  <a:srgbClr val="1D1D1F"/>
                 </a:solidFill>
                 <a:latin typeface="Manrope SemiBold" pitchFamily="2" charset="0"/>
               </a:rPr>
@@ -20919,11 +20920,11 @@
             </a:avLst>
           </a:prstGeom>
           <a:solidFill>
-            <a:srgbClr val="121A23"/>
+            <a:srgbClr val="FFFFFF"/>
           </a:solidFill>
           <a:ln w="9525">
             <a:solidFill>
-              <a:srgbClr val="243040"/>
+              <a:srgbClr val="E2E8ED"/>
             </a:solidFill>
           </a:ln>
         </p:spPr>
@@ -20988,7 +20989,7 @@
             <a:r>
               <a:rPr lang="fr-FR" sz="1900">
                 <a:solidFill>
-                  <a:srgbClr val="F2F5F8"/>
+                  <a:srgbClr val="1D1D1F"/>
                 </a:solidFill>
                 <a:latin typeface="Manrope SemiBold" pitchFamily="2" charset="0"/>
               </a:rPr>
@@ -21033,7 +21034,7 @@
             <a:r>
               <a:rPr lang="fr-FR" sz="1300">
                 <a:solidFill>
-                  <a:srgbClr val="A9CCE3"/>
+                  <a:srgbClr val="24577A"/>
                 </a:solidFill>
                 <a:latin typeface="Manrope Medium" pitchFamily="2" charset="0"/>
               </a:rPr>
@@ -21078,7 +21079,7 @@
             <a:r>
               <a:rPr lang="fr-FR" sz="1250">
                 <a:solidFill>
-                  <a:srgbClr val="9CA9B6"/>
+                  <a:srgbClr val="5F6B76"/>
                 </a:solidFill>
                 <a:latin typeface="Manrope" pitchFamily="2" charset="0"/>
               </a:rPr>
@@ -21110,11 +21111,11 @@
             </a:avLst>
           </a:prstGeom>
           <a:solidFill>
-            <a:srgbClr val="121A23"/>
+            <a:srgbClr val="FFFFFF"/>
           </a:solidFill>
           <a:ln w="9525">
             <a:solidFill>
-              <a:srgbClr val="243040"/>
+              <a:srgbClr val="E2E8ED"/>
             </a:solidFill>
           </a:ln>
         </p:spPr>
@@ -21179,7 +21180,7 @@
             <a:r>
               <a:rPr lang="fr-FR" sz="1900">
                 <a:solidFill>
-                  <a:srgbClr val="F2F5F8"/>
+                  <a:srgbClr val="1D1D1F"/>
                 </a:solidFill>
                 <a:latin typeface="Manrope SemiBold" pitchFamily="2" charset="0"/>
               </a:rPr>
@@ -21224,7 +21225,7 @@
             <a:r>
               <a:rPr lang="fr-FR" sz="1300">
                 <a:solidFill>
-                  <a:srgbClr val="A9CCE3"/>
+                  <a:srgbClr val="24577A"/>
                 </a:solidFill>
                 <a:latin typeface="Manrope Medium" pitchFamily="2" charset="0"/>
               </a:rPr>
@@ -21269,7 +21270,7 @@
             <a:r>
               <a:rPr lang="fr-FR" sz="1250">
                 <a:solidFill>
-                  <a:srgbClr val="9CA9B6"/>
+                  <a:srgbClr val="5F6B76"/>
                 </a:solidFill>
                 <a:latin typeface="Manrope" pitchFamily="2" charset="0"/>
               </a:rPr>
@@ -21301,11 +21302,11 @@
             </a:avLst>
           </a:prstGeom>
           <a:solidFill>
-            <a:srgbClr val="121A23"/>
+            <a:srgbClr val="FFFFFF"/>
           </a:solidFill>
           <a:ln w="9525">
             <a:solidFill>
-              <a:srgbClr val="243040"/>
+              <a:srgbClr val="E2E8ED"/>
             </a:solidFill>
           </a:ln>
         </p:spPr>
@@ -21370,7 +21371,7 @@
             <a:r>
               <a:rPr lang="fr-FR" sz="1900">
                 <a:solidFill>
-                  <a:srgbClr val="F2F5F8"/>
+                  <a:srgbClr val="1D1D1F"/>
                 </a:solidFill>
                 <a:latin typeface="Manrope SemiBold" pitchFamily="2" charset="0"/>
               </a:rPr>
@@ -21415,7 +21416,7 @@
             <a:r>
               <a:rPr lang="fr-FR" sz="1300">
                 <a:solidFill>
-                  <a:srgbClr val="A9CCE3"/>
+                  <a:srgbClr val="24577A"/>
                 </a:solidFill>
                 <a:latin typeface="Manrope Medium" pitchFamily="2" charset="0"/>
               </a:rPr>
@@ -21460,7 +21461,7 @@
             <a:r>
               <a:rPr lang="fr-FR" sz="1250">
                 <a:solidFill>
-                  <a:srgbClr val="9CA9B6"/>
+                  <a:srgbClr val="5F6B76"/>
                 </a:solidFill>
                 <a:latin typeface="Manrope" pitchFamily="2" charset="0"/>
               </a:rPr>
@@ -21505,7 +21506,7 @@
             <a:r>
               <a:rPr lang="fr-FR" sz="1700">
                 <a:solidFill>
-                  <a:srgbClr val="F2F5F8"/>
+                  <a:srgbClr val="1D1D1F"/>
                 </a:solidFill>
                 <a:latin typeface="Manrope Medium" pitchFamily="2" charset="0"/>
               </a:rPr>
@@ -21550,7 +21551,7 @@
             <a:r>
               <a:rPr lang="fr-FR" sz="1300">
                 <a:solidFill>
-                  <a:srgbClr val="9CA9B6"/>
+                  <a:srgbClr val="5F6B76"/>
                 </a:solidFill>
                 <a:latin typeface="Manrope" pitchFamily="2" charset="0"/>
               </a:rPr>
@@ -21581,7 +21582,7 @@
           </a:prstGeom>
           <a:ln w="15875">
             <a:solidFill>
-              <a:srgbClr val="9CA9B6"/>
+              <a:srgbClr val="5F6B76"/>
             </a:solidFill>
             <a:tailEnd type="triangle" w="med" len="med"/>
           </a:ln>
@@ -21637,7 +21638,7 @@
             <a:r>
               <a:rPr lang="fr-FR" sz="1700">
                 <a:solidFill>
-                  <a:srgbClr val="F2F5F8"/>
+                  <a:srgbClr val="1D1D1F"/>
                 </a:solidFill>
                 <a:latin typeface="Manrope Medium" pitchFamily="2" charset="0"/>
               </a:rPr>
@@ -21682,7 +21683,7 @@
             <a:r>
               <a:rPr lang="fr-FR" sz="1300">
                 <a:solidFill>
-                  <a:srgbClr val="9CA9B6"/>
+                  <a:srgbClr val="5F6B76"/>
                 </a:solidFill>
                 <a:latin typeface="Manrope" pitchFamily="2" charset="0"/>
               </a:rPr>
@@ -21713,7 +21714,7 @@
           </a:prstGeom>
           <a:ln w="15875">
             <a:solidFill>
-              <a:srgbClr val="9CA9B6"/>
+              <a:srgbClr val="5F6B76"/>
             </a:solidFill>
             <a:tailEnd type="triangle" w="med" len="med"/>
           </a:ln>
@@ -21769,7 +21770,7 @@
             <a:r>
               <a:rPr lang="fr-FR" sz="1700">
                 <a:solidFill>
-                  <a:srgbClr val="F2F5F8"/>
+                  <a:srgbClr val="1D1D1F"/>
                 </a:solidFill>
                 <a:latin typeface="Manrope Medium" pitchFamily="2" charset="0"/>
               </a:rPr>
@@ -21814,7 +21815,7 @@
             <a:r>
               <a:rPr lang="fr-FR" sz="1300">
                 <a:solidFill>
-                  <a:srgbClr val="9CA9B6"/>
+                  <a:srgbClr val="5F6B76"/>
                 </a:solidFill>
                 <a:latin typeface="Manrope" pitchFamily="2" charset="0"/>
               </a:rPr>
@@ -21859,7 +21860,7 @@
             <a:r>
               <a:rPr lang="fr-FR" sz="1600">
                 <a:solidFill>
-                  <a:srgbClr val="A9CCE3"/>
+                  <a:srgbClr val="24577A"/>
                 </a:solidFill>
                 <a:latin typeface="Manrope Medium" pitchFamily="2" charset="0"/>
               </a:rPr>
